--- a/entregaveis/apresentacao_executiva.pptx
+++ b/entregaveis/apresentacao_executiva.pptx
@@ -16,9 +16,6 @@
     <p:sldId id="264" r:id="rId15"/>
     <p:sldId id="265" r:id="rId16"/>
     <p:sldId id="266" r:id="rId17"/>
-    <p:sldId id="267" r:id="rId18"/>
-    <p:sldId id="268" r:id="rId19"/>
-    <p:sldId id="269" r:id="rId20"/>
   </p:sldIdLst>
   <p:sldSz cx="12188952" cy="6858000" type="screen4x3"/>
   <p:notesSz cx="6858000" cy="9144000"/>
@@ -3823,7 +3820,7 @@
                 </a:solidFill>
                 <a:latin typeface="Calibri"/>
               </a:rPr>
-              <a:t>Dados: PNAD Contínua 2016–2025 (IBGE)  |  5 metodologias estatísticas  |  Período: 10 anos</a:t>
+              <a:t>Dados: PNAD Contínua 2016–2025 (IBGE)  |  Núcleo de 4 métodos + robustez  |  Período: 10 anos</a:t>
             </a:r>
           </a:p>
         </p:txBody>
@@ -3917,7 +3914,7 @@
                 </a:solidFill>
                 <a:latin typeface="Calibri"/>
               </a:rPr>
-              <a:t>O Custo para Todos Nós — Inclusão Produtiva como Oportunidade</a:t>
+              <a:t>A Urgência — O Que Está em Jogo</a:t>
             </a:r>
           </a:p>
         </p:txBody>
@@ -3952,14 +3949,14 @@
                 </a:solidFill>
                 <a:latin typeface="Calibri"/>
               </a:rPr>
-              <a:t>Hsieh et al. (2019): discriminação racial e de gênero custou ao EUA 20–40% do crescimento 1960–2010</a:t>
+              <a:t>Pleno emprego sem prosperidade: 94,4% empregados, renda real estagnada</a:t>
             </a:r>
           </a:p>
         </p:txBody>
       </p:sp>
       <p:pic>
         <p:nvPicPr>
-          <p:cNvPr id="5" name="Picture 4" descr="estado_h4_inclusao.png"/>
+          <p:cNvPr id="5" name="Picture 4" descr="estado_h4_tendencia.png"/>
           <p:cNvPicPr>
             <a:picLocks noChangeAspect="1"/>
           </p:cNvPicPr>
@@ -3974,49 +3971,37 @@
         <p:spPr>
           <a:xfrm>
             <a:off x="274320" y="1097280"/>
-            <a:ext cx="5943600" cy="2497233"/>
+            <a:ext cx="5669280" cy="2387374"/>
           </a:xfrm>
           <a:prstGeom prst="rect">
             <a:avLst/>
           </a:prstGeom>
         </p:spPr>
       </p:pic>
-      <p:sp>
-        <p:nvSpPr>
-          <p:cNvPr id="6" name="TextBox 5"/>
-          <p:cNvSpPr txBox="1"/>
-          <p:nvPr/>
-        </p:nvSpPr>
-        <p:spPr>
-          <a:xfrm>
-            <a:off x="6675120" y="1097280"/>
-            <a:ext cx="5303520" cy="594360"/>
-          </a:xfrm>
-          <a:prstGeom prst="rect">
-            <a:avLst/>
-          </a:prstGeom>
-          <a:noFill/>
-        </p:spPr>
-        <p:txBody>
-          <a:bodyPr wrap="square">
-            <a:spAutoFit/>
-          </a:bodyPr>
-          <a:lstStyle/>
-          <a:p>
-            <a:pPr algn="l"/>
-            <a:r>
-              <a:rPr sz="1600" b="1" i="0">
-                <a:solidFill>
-                  <a:srgbClr val="1B2A4A"/>
-                </a:solidFill>
-                <a:latin typeface="Calibri"/>
-              </a:rPr>
-              <a:t>O que aconteceria se negros tivessem
-acesso igual às melhores vagas?</a:t>
-            </a:r>
-          </a:p>
-        </p:txBody>
-      </p:sp>
+      <p:pic>
+        <p:nvPicPr>
+          <p:cNvPr id="6" name="Picture 5" descr="estado_h5_armadilha.png"/>
+          <p:cNvPicPr>
+            <a:picLocks noChangeAspect="1"/>
+          </p:cNvPicPr>
+          <p:nvPr/>
+        </p:nvPicPr>
+        <p:blipFill>
+          <a:blip r:embed="rId3"/>
+          <a:stretch>
+            <a:fillRect/>
+          </a:stretch>
+        </p:blipFill>
+        <p:spPr>
+          <a:xfrm>
+            <a:off x="6126480" y="1097280"/>
+            <a:ext cx="5760720" cy="2423207"/>
+          </a:xfrm>
+          <a:prstGeom prst="rect">
+            <a:avLst/>
+          </a:prstGeom>
+        </p:spPr>
+      </p:pic>
       <p:sp>
         <p:nvSpPr>
           <p:cNvPr id="7" name="Rectangle 6"/>
@@ -4025,18 +4010,18 @@
         </p:nvSpPr>
         <p:spPr>
           <a:xfrm>
-            <a:off x="6675120" y="1828800"/>
-            <a:ext cx="5303520" cy="1261872"/>
+            <a:off x="274320" y="4754880"/>
+            <a:ext cx="2743200" cy="1234440"/>
           </a:xfrm>
           <a:prstGeom prst="rect">
             <a:avLst/>
           </a:prstGeom>
           <a:solidFill>
-            <a:srgbClr val="F5F5F5"/>
+            <a:srgbClr val="E8F5E9"/>
           </a:solidFill>
-          <a:ln w="25400">
+          <a:ln w="19050">
             <a:solidFill>
-              <a:srgbClr val="C62828"/>
+              <a:srgbClr val="2E7D32"/>
             </a:solidFill>
           </a:ln>
         </p:spPr>
@@ -4064,22 +4049,131 @@
       </p:sp>
       <p:sp>
         <p:nvSpPr>
-          <p:cNvPr id="8" name="Rectangle 7"/>
+          <p:cNvPr id="8" name="TextBox 7"/>
+          <p:cNvSpPr txBox="1"/>
+          <p:nvPr/>
+        </p:nvSpPr>
+        <p:spPr>
+          <a:xfrm>
+            <a:off x="365760" y="4828032"/>
+            <a:ext cx="2560320" cy="658368"/>
+          </a:xfrm>
+          <a:prstGeom prst="rect">
+            <a:avLst/>
+          </a:prstGeom>
+          <a:noFill/>
+        </p:spPr>
+        <p:txBody>
+          <a:bodyPr wrap="square">
+            <a:spAutoFit/>
+          </a:bodyPr>
+          <a:lstStyle/>
+          <a:p>
+            <a:pPr algn="ctr"/>
+            <a:r>
+              <a:rPr sz="3400" b="1" i="0">
+                <a:solidFill>
+                  <a:srgbClr val="2E7D32"/>
+                </a:solidFill>
+                <a:latin typeface="Calibri"/>
+              </a:rPr>
+              <a:t>94,4%</a:t>
+            </a:r>
+          </a:p>
+        </p:txBody>
+      </p:sp>
+      <p:sp>
+        <p:nvSpPr>
+          <p:cNvPr id="9" name="TextBox 8"/>
+          <p:cNvSpPr txBox="1"/>
+          <p:nvPr/>
+        </p:nvSpPr>
+        <p:spPr>
+          <a:xfrm>
+            <a:off x="365760" y="5468112"/>
+            <a:ext cx="2560320" cy="320040"/>
+          </a:xfrm>
+          <a:prstGeom prst="rect">
+            <a:avLst/>
+          </a:prstGeom>
+          <a:noFill/>
+        </p:spPr>
+        <p:txBody>
+          <a:bodyPr wrap="square">
+            <a:spAutoFit/>
+          </a:bodyPr>
+          <a:lstStyle/>
+          <a:p>
+            <a:pPr algn="ctr"/>
+            <a:r>
+              <a:rPr sz="1150" b="1" i="0">
+                <a:solidFill>
+                  <a:srgbClr val="212121"/>
+                </a:solidFill>
+                <a:latin typeface="Calibri"/>
+              </a:rPr>
+              <a:t>emprego em 2025</a:t>
+            </a:r>
+          </a:p>
+        </p:txBody>
+      </p:sp>
+      <p:sp>
+        <p:nvSpPr>
+          <p:cNvPr id="10" name="TextBox 9"/>
+          <p:cNvSpPr txBox="1"/>
+          <p:nvPr/>
+        </p:nvSpPr>
+        <p:spPr>
+          <a:xfrm>
+            <a:off x="365760" y="5779008"/>
+            <a:ext cx="2560320" cy="292608"/>
+          </a:xfrm>
+          <a:prstGeom prst="rect">
+            <a:avLst/>
+          </a:prstGeom>
+          <a:noFill/>
+        </p:spPr>
+        <p:txBody>
+          <a:bodyPr wrap="square">
+            <a:spAutoFit/>
+          </a:bodyPr>
+          <a:lstStyle/>
+          <a:p>
+            <a:pPr algn="ctr"/>
+            <a:r>
+              <a:rPr sz="950" b="0" i="1">
+                <a:solidFill>
+                  <a:srgbClr val="616161"/>
+                </a:solidFill>
+                <a:latin typeface="Calibri"/>
+              </a:rPr>
+              <a:t>máxima histórica da série</a:t>
+            </a:r>
+          </a:p>
+        </p:txBody>
+      </p:sp>
+      <p:sp>
+        <p:nvSpPr>
+          <p:cNvPr id="11" name="Rectangle 10"/>
           <p:cNvSpPr/>
           <p:nvPr/>
         </p:nvSpPr>
         <p:spPr>
           <a:xfrm>
-            <a:off x="6675120" y="1828800"/>
-            <a:ext cx="5303520" cy="365760"/>
+            <a:off x="3200400" y="4754880"/>
+            <a:ext cx="2743200" cy="1234440"/>
           </a:xfrm>
           <a:prstGeom prst="rect">
             <a:avLst/>
           </a:prstGeom>
           <a:solidFill>
-            <a:srgbClr val="C62828"/>
+            <a:srgbClr val="FFEBEE"/>
           </a:solidFill>
-          <a:ln/>
+          <a:ln w="19050">
+            <a:solidFill>
+              <a:srgbClr val="C62828"/>
+            </a:solidFill>
+          </a:ln>
         </p:spPr>
         <p:style>
           <a:lnRef idx="1">
@@ -4105,129 +4199,129 @@
       </p:sp>
       <p:sp>
         <p:nvSpPr>
-          <p:cNvPr id="9" name="TextBox 8"/>
-          <p:cNvSpPr txBox="1"/>
-          <p:nvPr/>
-        </p:nvSpPr>
-        <p:spPr>
-          <a:xfrm>
-            <a:off x="6812280" y="1865376"/>
-            <a:ext cx="5029200" cy="347472"/>
-          </a:xfrm>
-          <a:prstGeom prst="rect">
-            <a:avLst/>
-          </a:prstGeom>
-          <a:noFill/>
-        </p:spPr>
-        <p:txBody>
-          <a:bodyPr wrap="square">
-            <a:spAutoFit/>
-          </a:bodyPr>
-          <a:lstStyle/>
-          <a:p>
-            <a:pPr algn="l"/>
-            <a:r>
-              <a:rPr sz="1400" b="1" i="0">
-                <a:solidFill>
-                  <a:srgbClr val="FFFFFF"/>
-                </a:solidFill>
-                <a:latin typeface="Calibri"/>
-              </a:rPr>
-              <a:t>Hoje</a:t>
-            </a:r>
-          </a:p>
-        </p:txBody>
-      </p:sp>
-      <p:sp>
-        <p:nvSpPr>
-          <p:cNvPr id="10" name="TextBox 9"/>
-          <p:cNvSpPr txBox="1"/>
-          <p:nvPr/>
-        </p:nvSpPr>
-        <p:spPr>
-          <a:xfrm>
-            <a:off x="6812280" y="2240280"/>
-            <a:ext cx="5029200" cy="347472"/>
-          </a:xfrm>
-          <a:prstGeom prst="rect">
-            <a:avLst/>
-          </a:prstGeom>
-          <a:noFill/>
-        </p:spPr>
-        <p:txBody>
-          <a:bodyPr wrap="square">
-            <a:spAutoFit/>
-          </a:bodyPr>
-          <a:lstStyle/>
-          <a:p>
-            <a:pPr algn="l"/>
-            <a:r>
-              <a:rPr sz="1200" b="1" i="0">
+          <p:cNvPr id="12" name="TextBox 11"/>
+          <p:cNvSpPr txBox="1"/>
+          <p:nvPr/>
+        </p:nvSpPr>
+        <p:spPr>
+          <a:xfrm>
+            <a:off x="3291840" y="4828032"/>
+            <a:ext cx="2560320" cy="658368"/>
+          </a:xfrm>
+          <a:prstGeom prst="rect">
+            <a:avLst/>
+          </a:prstGeom>
+          <a:noFill/>
+        </p:spPr>
+        <p:txBody>
+          <a:bodyPr wrap="square">
+            <a:spAutoFit/>
+          </a:bodyPr>
+          <a:lstStyle/>
+          <a:p>
+            <a:pPr algn="ctr"/>
+            <a:r>
+              <a:rPr sz="3400" b="1" i="0">
                 <a:solidFill>
                   <a:srgbClr val="C62828"/>
                 </a:solidFill>
                 <a:latin typeface="Calibri"/>
               </a:rPr>
-              <a:t>Mediana salarial: R$2.000 (brancos) vs R$1.450 (negros) — gap de 27,5%</a:t>
-            </a:r>
-          </a:p>
-        </p:txBody>
-      </p:sp>
-      <p:sp>
-        <p:nvSpPr>
-          <p:cNvPr id="11" name="TextBox 10"/>
-          <p:cNvSpPr txBox="1"/>
-          <p:nvPr/>
-        </p:nvSpPr>
-        <p:spPr>
-          <a:xfrm>
-            <a:off x="6812280" y="2578608"/>
-            <a:ext cx="5029200" cy="347472"/>
-          </a:xfrm>
-          <a:prstGeom prst="rect">
-            <a:avLst/>
-          </a:prstGeom>
-          <a:noFill/>
-        </p:spPr>
-        <p:txBody>
-          <a:bodyPr wrap="square">
-            <a:spAutoFit/>
-          </a:bodyPr>
-          <a:lstStyle/>
-          <a:p>
-            <a:pPr algn="l"/>
-            <a:r>
-              <a:rPr sz="1100" b="0" i="1">
+              <a:t>R$1.283</a:t>
+            </a:r>
+          </a:p>
+        </p:txBody>
+      </p:sp>
+      <p:sp>
+        <p:nvSpPr>
+          <p:cNvPr id="13" name="TextBox 12"/>
+          <p:cNvSpPr txBox="1"/>
+          <p:nvPr/>
+        </p:nvSpPr>
+        <p:spPr>
+          <a:xfrm>
+            <a:off x="3291840" y="5468112"/>
+            <a:ext cx="2560320" cy="320040"/>
+          </a:xfrm>
+          <a:prstGeom prst="rect">
+            <a:avLst/>
+          </a:prstGeom>
+          <a:noFill/>
+        </p:spPr>
+        <p:txBody>
+          <a:bodyPr wrap="square">
+            <a:spAutoFit/>
+          </a:bodyPr>
+          <a:lstStyle/>
+          <a:p>
+            <a:pPr algn="ctr"/>
+            <a:r>
+              <a:rPr sz="1150" b="1" i="0">
+                <a:solidFill>
+                  <a:srgbClr val="212121"/>
+                </a:solidFill>
+                <a:latin typeface="Calibri"/>
+              </a:rPr>
+              <a:t>renda real 2025</a:t>
+            </a:r>
+          </a:p>
+        </p:txBody>
+      </p:sp>
+      <p:sp>
+        <p:nvSpPr>
+          <p:cNvPr id="14" name="TextBox 13"/>
+          <p:cNvSpPr txBox="1"/>
+          <p:nvPr/>
+        </p:nvSpPr>
+        <p:spPr>
+          <a:xfrm>
+            <a:off x="3291840" y="5779008"/>
+            <a:ext cx="2560320" cy="292608"/>
+          </a:xfrm>
+          <a:prstGeom prst="rect">
+            <a:avLst/>
+          </a:prstGeom>
+          <a:noFill/>
+        </p:spPr>
+        <p:txBody>
+          <a:bodyPr wrap="square">
+            <a:spAutoFit/>
+          </a:bodyPr>
+          <a:lstStyle/>
+          <a:p>
+            <a:pPr algn="ctr"/>
+            <a:r>
+              <a:rPr sz="950" b="0" i="1">
                 <a:solidFill>
                   <a:srgbClr val="616161"/>
                 </a:solidFill>
                 <a:latin typeface="Calibri"/>
               </a:rPr>
-              <a:t>Gap médio de 37,5%; em cargos de alta qualificação: 11% negros vs 22% brancos</a:t>
-            </a:r>
-          </a:p>
-        </p:txBody>
-      </p:sp>
-      <p:sp>
-        <p:nvSpPr>
-          <p:cNvPr id="12" name="Rectangle 11"/>
+              <a:t>queda vs R$1.345 em 2024</a:t>
+            </a:r>
+          </a:p>
+        </p:txBody>
+      </p:sp>
+      <p:sp>
+        <p:nvSpPr>
+          <p:cNvPr id="15" name="Rectangle 14"/>
           <p:cNvSpPr/>
           <p:nvPr/>
         </p:nvSpPr>
         <p:spPr>
           <a:xfrm>
-            <a:off x="6675120" y="3200400"/>
-            <a:ext cx="5303520" cy="1261872"/>
+            <a:off x="6126480" y="4754880"/>
+            <a:ext cx="2743200" cy="1234440"/>
           </a:xfrm>
           <a:prstGeom prst="rect">
             <a:avLst/>
           </a:prstGeom>
           <a:solidFill>
-            <a:srgbClr val="F5F5F5"/>
+            <a:srgbClr val="FFEBEE"/>
           </a:solidFill>
-          <a:ln w="25400">
+          <a:ln w="19050">
             <a:solidFill>
-              <a:srgbClr val="2E7D32"/>
+              <a:srgbClr val="C62828"/>
             </a:solidFill>
           </a:ln>
         </p:spPr>
@@ -4255,22 +4349,132 @@
       </p:sp>
       <p:sp>
         <p:nvSpPr>
-          <p:cNvPr id="13" name="Rectangle 12"/>
+          <p:cNvPr id="16" name="TextBox 15"/>
+          <p:cNvSpPr txBox="1"/>
+          <p:nvPr/>
+        </p:nvSpPr>
+        <p:spPr>
+          <a:xfrm>
+            <a:off x="6217920" y="4828032"/>
+            <a:ext cx="2560320" cy="658368"/>
+          </a:xfrm>
+          <a:prstGeom prst="rect">
+            <a:avLst/>
+          </a:prstGeom>
+          <a:noFill/>
+        </p:spPr>
+        <p:txBody>
+          <a:bodyPr wrap="square">
+            <a:spAutoFit/>
+          </a:bodyPr>
+          <a:lstStyle/>
+          <a:p>
+            <a:pPr algn="ctr"/>
+            <a:r>
+              <a:rPr sz="3400" b="1" i="0">
+                <a:solidFill>
+                  <a:srgbClr val="C62828"/>
+                </a:solidFill>
+                <a:latin typeface="Calibri"/>
+              </a:rPr>
+              <a:t>11%</a:t>
+            </a:r>
+          </a:p>
+        </p:txBody>
+      </p:sp>
+      <p:sp>
+        <p:nvSpPr>
+          <p:cNvPr id="17" name="TextBox 16"/>
+          <p:cNvSpPr txBox="1"/>
+          <p:nvPr/>
+        </p:nvSpPr>
+        <p:spPr>
+          <a:xfrm>
+            <a:off x="6217920" y="5468112"/>
+            <a:ext cx="2560320" cy="320040"/>
+          </a:xfrm>
+          <a:prstGeom prst="rect">
+            <a:avLst/>
+          </a:prstGeom>
+          <a:noFill/>
+        </p:spPr>
+        <p:txBody>
+          <a:bodyPr wrap="square">
+            <a:spAutoFit/>
+          </a:bodyPr>
+          <a:lstStyle/>
+          <a:p>
+            <a:pPr algn="ctr"/>
+            <a:r>
+              <a:rPr sz="1150" b="1" i="0">
+                <a:solidFill>
+                  <a:srgbClr val="212121"/>
+                </a:solidFill>
+                <a:latin typeface="Calibri"/>
+              </a:rPr>
+              <a:t>negros em alta
+qualificação</a:t>
+            </a:r>
+          </a:p>
+        </p:txBody>
+      </p:sp>
+      <p:sp>
+        <p:nvSpPr>
+          <p:cNvPr id="18" name="TextBox 17"/>
+          <p:cNvSpPr txBox="1"/>
+          <p:nvPr/>
+        </p:nvSpPr>
+        <p:spPr>
+          <a:xfrm>
+            <a:off x="6217920" y="5779008"/>
+            <a:ext cx="2560320" cy="292608"/>
+          </a:xfrm>
+          <a:prstGeom prst="rect">
+            <a:avLst/>
+          </a:prstGeom>
+          <a:noFill/>
+        </p:spPr>
+        <p:txBody>
+          <a:bodyPr wrap="square">
+            <a:spAutoFit/>
+          </a:bodyPr>
+          <a:lstStyle/>
+          <a:p>
+            <a:pPr algn="ctr"/>
+            <a:r>
+              <a:rPr sz="950" b="0" i="1">
+                <a:solidFill>
+                  <a:srgbClr val="616161"/>
+                </a:solidFill>
+                <a:latin typeface="Calibri"/>
+              </a:rPr>
+              <a:t>brancos: 22,4%</a:t>
+            </a:r>
+          </a:p>
+        </p:txBody>
+      </p:sp>
+      <p:sp>
+        <p:nvSpPr>
+          <p:cNvPr id="19" name="Rectangle 18"/>
           <p:cNvSpPr/>
           <p:nvPr/>
         </p:nvSpPr>
         <p:spPr>
           <a:xfrm>
-            <a:off x="6675120" y="3200400"/>
-            <a:ext cx="5303520" cy="365760"/>
+            <a:off x="9052560" y="4754880"/>
+            <a:ext cx="2743200" cy="1234440"/>
           </a:xfrm>
           <a:prstGeom prst="rect">
             <a:avLst/>
           </a:prstGeom>
           <a:solidFill>
-            <a:srgbClr val="2E7D32"/>
+            <a:srgbClr val="FFF9E7"/>
           </a:solidFill>
-          <a:ln/>
+          <a:ln w="19050">
+            <a:solidFill>
+              <a:srgbClr val="FF8F00"/>
+            </a:solidFill>
+          </a:ln>
         </p:spPr>
         <p:style>
           <a:lnRef idx="1">
@@ -4296,129 +4500,130 @@
       </p:sp>
       <p:sp>
         <p:nvSpPr>
-          <p:cNvPr id="14" name="TextBox 13"/>
-          <p:cNvSpPr txBox="1"/>
-          <p:nvPr/>
-        </p:nvSpPr>
-        <p:spPr>
-          <a:xfrm>
-            <a:off x="6812280" y="3236976"/>
-            <a:ext cx="5029200" cy="347472"/>
-          </a:xfrm>
-          <a:prstGeom prst="rect">
-            <a:avLst/>
-          </a:prstGeom>
-          <a:noFill/>
-        </p:spPr>
-        <p:txBody>
-          <a:bodyPr wrap="square">
-            <a:spAutoFit/>
-          </a:bodyPr>
-          <a:lstStyle/>
-          <a:p>
-            <a:pPr algn="l"/>
-            <a:r>
-              <a:rPr sz="1400" b="1" i="0">
-                <a:solidFill>
-                  <a:srgbClr val="FFFFFF"/>
-                </a:solidFill>
-                <a:latin typeface="Calibri"/>
-              </a:rPr>
-              <a:t>+127% renda</a:t>
-            </a:r>
-          </a:p>
-        </p:txBody>
-      </p:sp>
-      <p:sp>
-        <p:nvSpPr>
-          <p:cNvPr id="15" name="TextBox 14"/>
-          <p:cNvSpPr txBox="1"/>
-          <p:nvPr/>
-        </p:nvSpPr>
-        <p:spPr>
-          <a:xfrm>
-            <a:off x="6812280" y="3611880"/>
-            <a:ext cx="5029200" cy="347472"/>
-          </a:xfrm>
-          <a:prstGeom prst="rect">
-            <a:avLst/>
-          </a:prstGeom>
-          <a:noFill/>
-        </p:spPr>
-        <p:txBody>
-          <a:bodyPr wrap="square">
-            <a:spAutoFit/>
-          </a:bodyPr>
-          <a:lstStyle/>
-          <a:p>
-            <a:pPr algn="l"/>
-            <a:r>
-              <a:rPr sz="1200" b="1" i="0">
-                <a:solidFill>
-                  <a:srgbClr val="2E7D32"/>
-                </a:solidFill>
-                <a:latin typeface="Calibri"/>
-              </a:rPr>
-              <a:t>Se negros tivessem a mesma distribuição ocupacional que brancos</a:t>
-            </a:r>
-          </a:p>
-        </p:txBody>
-      </p:sp>
-      <p:sp>
-        <p:nvSpPr>
-          <p:cNvPr id="16" name="TextBox 15"/>
-          <p:cNvSpPr txBox="1"/>
-          <p:nvPr/>
-        </p:nvSpPr>
-        <p:spPr>
-          <a:xfrm>
-            <a:off x="6812280" y="3950208"/>
-            <a:ext cx="5029200" cy="347472"/>
-          </a:xfrm>
-          <a:prstGeom prst="rect">
-            <a:avLst/>
-          </a:prstGeom>
-          <a:noFill/>
-        </p:spPr>
-        <p:txBody>
-          <a:bodyPr wrap="square">
-            <a:spAutoFit/>
-          </a:bodyPr>
-          <a:lstStyle/>
-          <a:p>
-            <a:pPr algn="l"/>
-            <a:r>
-              <a:rPr sz="1100" b="0" i="1">
+          <p:cNvPr id="20" name="TextBox 19"/>
+          <p:cNvSpPr txBox="1"/>
+          <p:nvPr/>
+        </p:nvSpPr>
+        <p:spPr>
+          <a:xfrm>
+            <a:off x="9144000" y="4828032"/>
+            <a:ext cx="2560320" cy="658368"/>
+          </a:xfrm>
+          <a:prstGeom prst="rect">
+            <a:avLst/>
+          </a:prstGeom>
+          <a:noFill/>
+        </p:spPr>
+        <p:txBody>
+          <a:bodyPr wrap="square">
+            <a:spAutoFit/>
+          </a:bodyPr>
+          <a:lstStyle/>
+          <a:p>
+            <a:pPr algn="ctr"/>
+            <a:r>
+              <a:rPr sz="3400" b="1" i="0">
+                <a:solidFill>
+                  <a:srgbClr val="FF8F00"/>
+                </a:solidFill>
+                <a:latin typeface="Calibri"/>
+              </a:rPr>
+              <a:t>+100</a:t>
+            </a:r>
+          </a:p>
+        </p:txBody>
+      </p:sp>
+      <p:sp>
+        <p:nvSpPr>
+          <p:cNvPr id="21" name="TextBox 20"/>
+          <p:cNvSpPr txBox="1"/>
+          <p:nvPr/>
+        </p:nvSpPr>
+        <p:spPr>
+          <a:xfrm>
+            <a:off x="9144000" y="5468112"/>
+            <a:ext cx="2560320" cy="320040"/>
+          </a:xfrm>
+          <a:prstGeom prst="rect">
+            <a:avLst/>
+          </a:prstGeom>
+          <a:noFill/>
+        </p:spPr>
+        <p:txBody>
+          <a:bodyPr wrap="square">
+            <a:spAutoFit/>
+          </a:bodyPr>
+          <a:lstStyle/>
+          <a:p>
+            <a:pPr algn="ctr"/>
+            <a:r>
+              <a:rPr sz="1150" b="1" i="0">
+                <a:solidFill>
+                  <a:srgbClr val="212121"/>
+                </a:solidFill>
+                <a:latin typeface="Calibri"/>
+              </a:rPr>
+              <a:t>anos para fechar
+o gap</a:t>
+            </a:r>
+          </a:p>
+        </p:txBody>
+      </p:sp>
+      <p:sp>
+        <p:nvSpPr>
+          <p:cNvPr id="22" name="TextBox 21"/>
+          <p:cNvSpPr txBox="1"/>
+          <p:nvPr/>
+        </p:nvSpPr>
+        <p:spPr>
+          <a:xfrm>
+            <a:off x="9144000" y="5779008"/>
+            <a:ext cx="2560320" cy="292608"/>
+          </a:xfrm>
+          <a:prstGeom prst="rect">
+            <a:avLst/>
+          </a:prstGeom>
+          <a:noFill/>
+        </p:spPr>
+        <p:txBody>
+          <a:bodyPr wrap="square">
+            <a:spAutoFit/>
+          </a:bodyPr>
+          <a:lstStyle/>
+          <a:p>
+            <a:pPr algn="ctr"/>
+            <a:r>
+              <a:rPr sz="950" b="0" i="1">
                 <a:solidFill>
                   <a:srgbClr val="616161"/>
                 </a:solidFill>
                 <a:latin typeface="Calibri"/>
               </a:rPr>
-              <a:t>A renda média dos trabalhadores negros mais que dobraria — sem nenhum aumento de produtividade</a:t>
-            </a:r>
-          </a:p>
-        </p:txBody>
-      </p:sp>
-      <p:sp>
-        <p:nvSpPr>
-          <p:cNvPr id="17" name="Rectangle 16"/>
+              <a:t>no ritmo atual</a:t>
+            </a:r>
+          </a:p>
+        </p:txBody>
+      </p:sp>
+      <p:sp>
+        <p:nvSpPr>
+          <p:cNvPr id="23" name="Rectangle 22"/>
           <p:cNvSpPr/>
           <p:nvPr/>
         </p:nvSpPr>
         <p:spPr>
           <a:xfrm>
-            <a:off x="6675120" y="4572000"/>
-            <a:ext cx="5303520" cy="1261872"/>
+            <a:off x="274320" y="6309360"/>
+            <a:ext cx="11612880" cy="402336"/>
           </a:xfrm>
           <a:prstGeom prst="rect">
             <a:avLst/>
           </a:prstGeom>
           <a:solidFill>
-            <a:srgbClr val="F5F5F5"/>
+            <a:srgbClr val="FFF9E7"/>
           </a:solidFill>
-          <a:ln w="25400">
+          <a:ln w="15240">
             <a:solidFill>
-              <a:srgbClr val="00696D"/>
+              <a:srgbClr val="FF8F00"/>
             </a:solidFill>
           </a:ln>
         </p:spPr>
@@ -4446,20 +4651,55 @@
       </p:sp>
       <p:sp>
         <p:nvSpPr>
-          <p:cNvPr id="18" name="Rectangle 17"/>
+          <p:cNvPr id="24" name="TextBox 23"/>
+          <p:cNvSpPr txBox="1"/>
+          <p:nvPr/>
+        </p:nvSpPr>
+        <p:spPr>
+          <a:xfrm>
+            <a:off x="411480" y="6400800"/>
+            <a:ext cx="11338560" cy="219456"/>
+          </a:xfrm>
+          <a:prstGeom prst="rect">
+            <a:avLst/>
+          </a:prstGeom>
+          <a:noFill/>
+        </p:spPr>
+        <p:txBody>
+          <a:bodyPr wrap="square">
+            <a:spAutoFit/>
+          </a:bodyPr>
+          <a:lstStyle/>
+          <a:p>
+            <a:pPr algn="ctr"/>
+            <a:r>
+              <a:rPr sz="1300" b="1" i="0">
+                <a:solidFill>
+                  <a:srgbClr val="1B2A4A"/>
+                </a:solidFill>
+                <a:latin typeface="Calibri"/>
+              </a:rPr>
+              <a:t>O Brasil está a produzir emprego, mas não prosperidade igualitária. Pleno emprego com segregação ocupacional é o cenário atual — e não se resolve sozinho.</a:t>
+            </a:r>
+          </a:p>
+        </p:txBody>
+      </p:sp>
+      <p:sp>
+        <p:nvSpPr>
+          <p:cNvPr id="25" name="Rectangle 24"/>
           <p:cNvSpPr/>
           <p:nvPr/>
         </p:nvSpPr>
         <p:spPr>
           <a:xfrm>
-            <a:off x="6675120" y="4572000"/>
-            <a:ext cx="5303520" cy="365760"/>
+            <a:off x="0" y="6629400"/>
+            <a:ext cx="12188952" cy="228600"/>
           </a:xfrm>
           <a:prstGeom prst="rect">
             <a:avLst/>
           </a:prstGeom>
           <a:solidFill>
-            <a:srgbClr val="00696D"/>
+            <a:srgbClr val="1B2A4A"/>
           </a:solidFill>
           <a:ln/>
         </p:spPr>
@@ -4487,153 +4727,7 @@
       </p:sp>
       <p:sp>
         <p:nvSpPr>
-          <p:cNvPr id="19" name="TextBox 18"/>
-          <p:cNvSpPr txBox="1"/>
-          <p:nvPr/>
-        </p:nvSpPr>
-        <p:spPr>
-          <a:xfrm>
-            <a:off x="6812280" y="4608576"/>
-            <a:ext cx="5029200" cy="347472"/>
-          </a:xfrm>
-          <a:prstGeom prst="rect">
-            <a:avLst/>
-          </a:prstGeom>
-          <a:noFill/>
-        </p:spPr>
-        <p:txBody>
-          <a:bodyPr wrap="square">
-            <a:spAutoFit/>
-          </a:bodyPr>
-          <a:lstStyle/>
-          <a:p>
-            <a:pPr algn="l"/>
-            <a:r>
-              <a:rPr sz="1400" b="1" i="0">
-                <a:solidFill>
-                  <a:srgbClr val="FFFFFF"/>
-                </a:solidFill>
-                <a:latin typeface="Calibri"/>
-              </a:rPr>
-              <a:t>Proxy: +74 p.p. PIB</a:t>
-            </a:r>
-          </a:p>
-        </p:txBody>
-      </p:sp>
-      <p:sp>
-        <p:nvSpPr>
-          <p:cNvPr id="20" name="TextBox 19"/>
-          <p:cNvSpPr txBox="1"/>
-          <p:nvPr/>
-        </p:nvSpPr>
-        <p:spPr>
-          <a:xfrm>
-            <a:off x="6812280" y="4983480"/>
-            <a:ext cx="5029200" cy="347472"/>
-          </a:xfrm>
-          <a:prstGeom prst="rect">
-            <a:avLst/>
-          </a:prstGeom>
-          <a:noFill/>
-        </p:spPr>
-        <p:txBody>
-          <a:bodyPr wrap="square">
-            <a:spAutoFit/>
-          </a:bodyPr>
-          <a:lstStyle/>
-          <a:p>
-            <a:pPr algn="l"/>
-            <a:r>
-              <a:rPr sz="1200" b="1" i="0">
-                <a:solidFill>
-                  <a:srgbClr val="00696D"/>
-                </a:solidFill>
-                <a:latin typeface="Calibri"/>
-              </a:rPr>
-              <a:t>Estimativa conservadora do impacto no crescimento</a:t>
-            </a:r>
-          </a:p>
-        </p:txBody>
-      </p:sp>
-      <p:sp>
-        <p:nvSpPr>
-          <p:cNvPr id="21" name="TextBox 20"/>
-          <p:cNvSpPr txBox="1"/>
-          <p:nvPr/>
-        </p:nvSpPr>
-        <p:spPr>
-          <a:xfrm>
-            <a:off x="6812280" y="5321808"/>
-            <a:ext cx="5029200" cy="347472"/>
-          </a:xfrm>
-          <a:prstGeom prst="rect">
-            <a:avLst/>
-          </a:prstGeom>
-          <a:noFill/>
-        </p:spPr>
-        <p:txBody>
-          <a:bodyPr wrap="square">
-            <a:spAutoFit/>
-          </a:bodyPr>
-          <a:lstStyle/>
-          <a:p>
-            <a:pPr algn="l"/>
-            <a:r>
-              <a:rPr sz="1100" b="0" i="1">
-                <a:solidFill>
-                  <a:srgbClr val="616161"/>
-                </a:solidFill>
-                <a:latin typeface="Calibri"/>
-              </a:rPr>
-              <a:t>Incluir negros nas melhores vagas seria um dos maiores motores de crescimento disponíveis hoje</a:t>
-            </a:r>
-          </a:p>
-        </p:txBody>
-      </p:sp>
-      <p:sp>
-        <p:nvSpPr>
-          <p:cNvPr id="22" name="Rectangle 21"/>
-          <p:cNvSpPr/>
-          <p:nvPr/>
-        </p:nvSpPr>
-        <p:spPr>
-          <a:xfrm>
-            <a:off x="0" y="6629400"/>
-            <a:ext cx="12188952" cy="228600"/>
-          </a:xfrm>
-          <a:prstGeom prst="rect">
-            <a:avLst/>
-          </a:prstGeom>
-          <a:solidFill>
-            <a:srgbClr val="1B2A4A"/>
-          </a:solidFill>
-          <a:ln/>
-        </p:spPr>
-        <p:style>
-          <a:lnRef idx="1">
-            <a:schemeClr val="accent1"/>
-          </a:lnRef>
-          <a:fillRef idx="3">
-            <a:schemeClr val="accent1"/>
-          </a:fillRef>
-          <a:effectRef idx="2">
-            <a:schemeClr val="accent1"/>
-          </a:effectRef>
-          <a:fontRef idx="minor">
-            <a:schemeClr val="lt1"/>
-          </a:fontRef>
-        </p:style>
-        <p:txBody>
-          <a:bodyPr rtlCol="0" anchor="ctr"/>
-          <a:lstStyle/>
-          <a:p>
-            <a:pPr algn="ctr"/>
-          </a:p>
-        </p:txBody>
-      </p:sp>
-      <p:sp>
-        <p:nvSpPr>
-          <p:cNvPr id="23" name="TextBox 22"/>
+          <p:cNvPr id="26" name="TextBox 25"/>
           <p:cNvSpPr txBox="1"/>
           <p:nvPr/>
         </p:nvSpPr>
@@ -4668,7 +4762,7 @@
       </p:sp>
       <p:sp>
         <p:nvSpPr>
-          <p:cNvPr id="24" name="TextBox 23"/>
+          <p:cNvPr id="27" name="TextBox 26"/>
           <p:cNvSpPr txBox="1"/>
           <p:nvPr/>
         </p:nvSpPr>
@@ -4696,7 +4790,7 @@
                 </a:solidFill>
                 <a:latin typeface="Calibri"/>
               </a:rPr>
-              <a:t>10/14</a:t>
+              <a:t>13/14</a:t>
             </a:r>
           </a:p>
         </p:txBody>
@@ -4728,3041 +4822,6 @@
         <p:spPr>
           <a:xfrm>
             <a:off x="0" y="0"/>
-            <a:ext cx="12188952" cy="960120"/>
-          </a:xfrm>
-          <a:prstGeom prst="rect">
-            <a:avLst/>
-          </a:prstGeom>
-          <a:solidFill>
-            <a:srgbClr val="1B2A4A"/>
-          </a:solidFill>
-          <a:ln/>
-        </p:spPr>
-        <p:style>
-          <a:lnRef idx="1">
-            <a:schemeClr val="accent1"/>
-          </a:lnRef>
-          <a:fillRef idx="3">
-            <a:schemeClr val="accent1"/>
-          </a:fillRef>
-          <a:effectRef idx="2">
-            <a:schemeClr val="accent1"/>
-          </a:effectRef>
-          <a:fontRef idx="minor">
-            <a:schemeClr val="lt1"/>
-          </a:fontRef>
-        </p:style>
-        <p:txBody>
-          <a:bodyPr rtlCol="0" anchor="ctr"/>
-          <a:lstStyle/>
-          <a:p>
-            <a:pPr algn="ctr"/>
-          </a:p>
-        </p:txBody>
-      </p:sp>
-      <p:sp>
-        <p:nvSpPr>
-          <p:cNvPr id="3" name="TextBox 2"/>
-          <p:cNvSpPr txBox="1"/>
-          <p:nvPr/>
-        </p:nvSpPr>
-        <p:spPr>
-          <a:xfrm>
-            <a:off x="320040" y="73152"/>
-            <a:ext cx="11247120" cy="502920"/>
-          </a:xfrm>
-          <a:prstGeom prst="rect">
-            <a:avLst/>
-          </a:prstGeom>
-          <a:noFill/>
-        </p:spPr>
-        <p:txBody>
-          <a:bodyPr wrap="square">
-            <a:spAutoFit/>
-          </a:bodyPr>
-          <a:lstStyle/>
-          <a:p>
-            <a:pPr algn="l"/>
-            <a:r>
-              <a:rPr sz="2600" b="1" i="0">
-                <a:solidFill>
-                  <a:srgbClr val="FFFFFF"/>
-                </a:solidFill>
-                <a:latin typeface="Calibri"/>
-              </a:rPr>
-              <a:t>O Racismo Tem Endereço — Varia Muito Entre Estados</a:t>
-            </a:r>
-          </a:p>
-        </p:txBody>
-      </p:sp>
-      <p:sp>
-        <p:nvSpPr>
-          <p:cNvPr id="4" name="TextBox 3"/>
-          <p:cNvSpPr txBox="1"/>
-          <p:nvPr/>
-        </p:nvSpPr>
-        <p:spPr>
-          <a:xfrm>
-            <a:off x="320040" y="576072"/>
-            <a:ext cx="11247120" cy="320040"/>
-          </a:xfrm>
-          <a:prstGeom prst="rect">
-            <a:avLst/>
-          </a:prstGeom>
-          <a:noFill/>
-        </p:spPr>
-        <p:txBody>
-          <a:bodyPr wrap="square">
-            <a:spAutoFit/>
-          </a:bodyPr>
-          <a:lstStyle/>
-          <a:p>
-            <a:pPr algn="l"/>
-            <a:r>
-              <a:rPr sz="1300" b="0" i="0">
-                <a:solidFill>
-                  <a:srgbClr val="BBDEFB"/>
-                </a:solidFill>
-                <a:latin typeface="Calibri"/>
-              </a:rPr>
-              <a:t>A desvantagem racial é bem maior em alguns estados — e a política pode (e deve) focar onde mais dói</a:t>
-            </a:r>
-          </a:p>
-        </p:txBody>
-      </p:sp>
-      <p:sp>
-        <p:nvSpPr>
-          <p:cNvPr id="5" name="TextBox 4"/>
-          <p:cNvSpPr txBox="1"/>
-          <p:nvPr/>
-        </p:nvSpPr>
-        <p:spPr>
-          <a:xfrm>
-            <a:off x="365760" y="1051560"/>
-            <a:ext cx="11430000" cy="365760"/>
-          </a:xfrm>
-          <a:prstGeom prst="rect">
-            <a:avLst/>
-          </a:prstGeom>
-          <a:noFill/>
-        </p:spPr>
-        <p:txBody>
-          <a:bodyPr wrap="square">
-            <a:spAutoFit/>
-          </a:bodyPr>
-          <a:lstStyle/>
-          <a:p>
-            <a:pPr algn="l"/>
-            <a:r>
-              <a:rPr sz="1600" b="1" i="0">
-                <a:solidFill>
-                  <a:srgbClr val="1B2A4A"/>
-                </a:solidFill>
-                <a:latin typeface="Calibri"/>
-              </a:rPr>
-              <a:t>A mesma injustiça, em tamanhos muito diferentes pelo país:</a:t>
-            </a:r>
-          </a:p>
-        </p:txBody>
-      </p:sp>
-      <p:pic>
-        <p:nvPicPr>
-          <p:cNvPr id="6" name="Picture 5" descr="mapa_po_regional.png"/>
-          <p:cNvPicPr>
-            <a:picLocks noChangeAspect="1"/>
-          </p:cNvPicPr>
-          <p:nvPr/>
-        </p:nvPicPr>
-        <p:blipFill>
-          <a:blip r:embed="rId2"/>
-          <a:stretch>
-            <a:fillRect/>
-          </a:stretch>
-        </p:blipFill>
-        <p:spPr>
-          <a:xfrm>
-            <a:off x="457200" y="1417320"/>
-            <a:ext cx="3931920" cy="3809481"/>
-          </a:xfrm>
-          <a:prstGeom prst="rect">
-            <a:avLst/>
-          </a:prstGeom>
-        </p:spPr>
-      </p:pic>
-      <p:sp>
-        <p:nvSpPr>
-          <p:cNvPr id="7" name="Rectangle 6"/>
-          <p:cNvSpPr/>
-          <p:nvPr/>
-        </p:nvSpPr>
-        <p:spPr>
-          <a:xfrm>
-            <a:off x="4937760" y="1417320"/>
-            <a:ext cx="6949440" cy="1371600"/>
-          </a:xfrm>
-          <a:prstGeom prst="rect">
-            <a:avLst/>
-          </a:prstGeom>
-          <a:solidFill>
-            <a:srgbClr val="F5F5F5"/>
-          </a:solidFill>
-          <a:ln w="25400">
-            <a:solidFill>
-              <a:srgbClr val="C62828"/>
-            </a:solidFill>
-          </a:ln>
-        </p:spPr>
-        <p:style>
-          <a:lnRef idx="1">
-            <a:schemeClr val="accent1"/>
-          </a:lnRef>
-          <a:fillRef idx="3">
-            <a:schemeClr val="accent1"/>
-          </a:fillRef>
-          <a:effectRef idx="2">
-            <a:schemeClr val="accent1"/>
-          </a:effectRef>
-          <a:fontRef idx="minor">
-            <a:schemeClr val="lt1"/>
-          </a:fontRef>
-        </p:style>
-        <p:txBody>
-          <a:bodyPr rtlCol="0" anchor="ctr"/>
-          <a:lstStyle/>
-          <a:p>
-            <a:pPr algn="ctr"/>
-          </a:p>
-        </p:txBody>
-      </p:sp>
-      <p:sp>
-        <p:nvSpPr>
-          <p:cNvPr id="8" name="Rectangle 7"/>
-          <p:cNvSpPr/>
-          <p:nvPr/>
-        </p:nvSpPr>
-        <p:spPr>
-          <a:xfrm>
-            <a:off x="4937760" y="1417320"/>
-            <a:ext cx="128016" cy="1371600"/>
-          </a:xfrm>
-          <a:prstGeom prst="rect">
-            <a:avLst/>
-          </a:prstGeom>
-          <a:solidFill>
-            <a:srgbClr val="C62828"/>
-          </a:solidFill>
-          <a:ln/>
-        </p:spPr>
-        <p:style>
-          <a:lnRef idx="1">
-            <a:schemeClr val="accent1"/>
-          </a:lnRef>
-          <a:fillRef idx="3">
-            <a:schemeClr val="accent1"/>
-          </a:fillRef>
-          <a:effectRef idx="2">
-            <a:schemeClr val="accent1"/>
-          </a:effectRef>
-          <a:fontRef idx="minor">
-            <a:schemeClr val="lt1"/>
-          </a:fontRef>
-        </p:style>
-        <p:txBody>
-          <a:bodyPr rtlCol="0" anchor="ctr"/>
-          <a:lstStyle/>
-          <a:p>
-            <a:pPr algn="ctr"/>
-          </a:p>
-        </p:txBody>
-      </p:sp>
-      <p:sp>
-        <p:nvSpPr>
-          <p:cNvPr id="9" name="TextBox 8"/>
-          <p:cNvSpPr txBox="1"/>
-          <p:nvPr/>
-        </p:nvSpPr>
-        <p:spPr>
-          <a:xfrm>
-            <a:off x="5138928" y="1481328"/>
-            <a:ext cx="6675120" cy="365760"/>
-          </a:xfrm>
-          <a:prstGeom prst="rect">
-            <a:avLst/>
-          </a:prstGeom>
-          <a:noFill/>
-        </p:spPr>
-        <p:txBody>
-          <a:bodyPr wrap="square">
-            <a:spAutoFit/>
-          </a:bodyPr>
-          <a:lstStyle/>
-          <a:p>
-            <a:pPr algn="l"/>
-            <a:r>
-              <a:rPr sz="1350" b="1" i="0">
-                <a:solidFill>
-                  <a:srgbClr val="C62828"/>
-                </a:solidFill>
-                <a:latin typeface="Calibri"/>
-              </a:rPr>
-              <a:t>O gap muda de estado para estado</a:t>
-            </a:r>
-          </a:p>
-        </p:txBody>
-      </p:sp>
-      <p:sp>
-        <p:nvSpPr>
-          <p:cNvPr id="10" name="TextBox 9"/>
-          <p:cNvSpPr txBox="1"/>
-          <p:nvPr/>
-        </p:nvSpPr>
-        <p:spPr>
-          <a:xfrm>
-            <a:off x="5138928" y="1892808"/>
-            <a:ext cx="6675120" cy="841248"/>
-          </a:xfrm>
-          <a:prstGeom prst="rect">
-            <a:avLst/>
-          </a:prstGeom>
-          <a:noFill/>
-        </p:spPr>
-        <p:txBody>
-          <a:bodyPr wrap="square">
-            <a:spAutoFit/>
-          </a:bodyPr>
-          <a:lstStyle/>
-          <a:p>
-            <a:pPr algn="l"/>
-            <a:r>
-              <a:rPr sz="1200" b="0" i="0">
-                <a:solidFill>
-                  <a:srgbClr val="212121"/>
-                </a:solidFill>
-                <a:latin typeface="Calibri"/>
-              </a:rPr>
-              <a:t>Chega a ~21% (DF) em alguns estados e cai a ~2% (MG) em outros. Não é o mesmo problema em todo lugar.</a:t>
-            </a:r>
-          </a:p>
-        </p:txBody>
-      </p:sp>
-      <p:sp>
-        <p:nvSpPr>
-          <p:cNvPr id="11" name="Rectangle 10"/>
-          <p:cNvSpPr/>
-          <p:nvPr/>
-        </p:nvSpPr>
-        <p:spPr>
-          <a:xfrm>
-            <a:off x="4937760" y="2898648"/>
-            <a:ext cx="6949440" cy="1371600"/>
-          </a:xfrm>
-          <a:prstGeom prst="rect">
-            <a:avLst/>
-          </a:prstGeom>
-          <a:solidFill>
-            <a:srgbClr val="F5F5F5"/>
-          </a:solidFill>
-          <a:ln w="25400">
-            <a:solidFill>
-              <a:srgbClr val="FF8F00"/>
-            </a:solidFill>
-          </a:ln>
-        </p:spPr>
-        <p:style>
-          <a:lnRef idx="1">
-            <a:schemeClr val="accent1"/>
-          </a:lnRef>
-          <a:fillRef idx="3">
-            <a:schemeClr val="accent1"/>
-          </a:fillRef>
-          <a:effectRef idx="2">
-            <a:schemeClr val="accent1"/>
-          </a:effectRef>
-          <a:fontRef idx="minor">
-            <a:schemeClr val="lt1"/>
-          </a:fontRef>
-        </p:style>
-        <p:txBody>
-          <a:bodyPr rtlCol="0" anchor="ctr"/>
-          <a:lstStyle/>
-          <a:p>
-            <a:pPr algn="ctr"/>
-          </a:p>
-        </p:txBody>
-      </p:sp>
-      <p:sp>
-        <p:nvSpPr>
-          <p:cNvPr id="12" name="Rectangle 11"/>
-          <p:cNvSpPr/>
-          <p:nvPr/>
-        </p:nvSpPr>
-        <p:spPr>
-          <a:xfrm>
-            <a:off x="4937760" y="2898648"/>
-            <a:ext cx="128016" cy="1371600"/>
-          </a:xfrm>
-          <a:prstGeom prst="rect">
-            <a:avLst/>
-          </a:prstGeom>
-          <a:solidFill>
-            <a:srgbClr val="FF8F00"/>
-          </a:solidFill>
-          <a:ln/>
-        </p:spPr>
-        <p:style>
-          <a:lnRef idx="1">
-            <a:schemeClr val="accent1"/>
-          </a:lnRef>
-          <a:fillRef idx="3">
-            <a:schemeClr val="accent1"/>
-          </a:fillRef>
-          <a:effectRef idx="2">
-            <a:schemeClr val="accent1"/>
-          </a:effectRef>
-          <a:fontRef idx="minor">
-            <a:schemeClr val="lt1"/>
-          </a:fontRef>
-        </p:style>
-        <p:txBody>
-          <a:bodyPr rtlCol="0" anchor="ctr"/>
-          <a:lstStyle/>
-          <a:p>
-            <a:pPr algn="ctr"/>
-          </a:p>
-        </p:txBody>
-      </p:sp>
-      <p:sp>
-        <p:nvSpPr>
-          <p:cNvPr id="13" name="TextBox 12"/>
-          <p:cNvSpPr txBox="1"/>
-          <p:nvPr/>
-        </p:nvSpPr>
-        <p:spPr>
-          <a:xfrm>
-            <a:off x="5138928" y="2962656"/>
-            <a:ext cx="6675120" cy="365760"/>
-          </a:xfrm>
-          <a:prstGeom prst="rect">
-            <a:avLst/>
-          </a:prstGeom>
-          <a:noFill/>
-        </p:spPr>
-        <p:txBody>
-          <a:bodyPr wrap="square">
-            <a:spAutoFit/>
-          </a:bodyPr>
-          <a:lstStyle/>
-          <a:p>
-            <a:pPr algn="l"/>
-            <a:r>
-              <a:rPr sz="1350" b="1" i="0">
-                <a:solidFill>
-                  <a:srgbClr val="FF8F00"/>
-                </a:solidFill>
-                <a:latin typeface="Calibri"/>
-              </a:rPr>
-              <a:t>Maior onde há mais riqueza</a:t>
-            </a:r>
-          </a:p>
-        </p:txBody>
-      </p:sp>
-      <p:sp>
-        <p:nvSpPr>
-          <p:cNvPr id="14" name="TextBox 13"/>
-          <p:cNvSpPr txBox="1"/>
-          <p:nvPr/>
-        </p:nvSpPr>
-        <p:spPr>
-          <a:xfrm>
-            <a:off x="5138928" y="3374136"/>
-            <a:ext cx="6675120" cy="841248"/>
-          </a:xfrm>
-          <a:prstGeom prst="rect">
-            <a:avLst/>
-          </a:prstGeom>
-          <a:noFill/>
-        </p:spPr>
-        <p:txBody>
-          <a:bodyPr wrap="square">
-            <a:spAutoFit/>
-          </a:bodyPr>
-          <a:lstStyle/>
-          <a:p>
-            <a:pPr algn="l"/>
-            <a:r>
-              <a:rPr sz="1200" b="0" i="0">
-                <a:solidFill>
-                  <a:srgbClr val="212121"/>
-                </a:solidFill>
-                <a:latin typeface="Calibri"/>
-              </a:rPr>
-              <a:t>As maiores desvantagens aparecem no Distrito Federal, no Rio e em São Paulo — crescimento econômico, sozinho, não dissolve a barreira racial.</a:t>
-            </a:r>
-          </a:p>
-        </p:txBody>
-      </p:sp>
-      <p:sp>
-        <p:nvSpPr>
-          <p:cNvPr id="15" name="Rectangle 14"/>
-          <p:cNvSpPr/>
-          <p:nvPr/>
-        </p:nvSpPr>
-        <p:spPr>
-          <a:xfrm>
-            <a:off x="4937760" y="4379976"/>
-            <a:ext cx="6949440" cy="1371600"/>
-          </a:xfrm>
-          <a:prstGeom prst="rect">
-            <a:avLst/>
-          </a:prstGeom>
-          <a:solidFill>
-            <a:srgbClr val="F5F5F5"/>
-          </a:solidFill>
-          <a:ln w="25400">
-            <a:solidFill>
-              <a:srgbClr val="2E7D32"/>
-            </a:solidFill>
-          </a:ln>
-        </p:spPr>
-        <p:style>
-          <a:lnRef idx="1">
-            <a:schemeClr val="accent1"/>
-          </a:lnRef>
-          <a:fillRef idx="3">
-            <a:schemeClr val="accent1"/>
-          </a:fillRef>
-          <a:effectRef idx="2">
-            <a:schemeClr val="accent1"/>
-          </a:effectRef>
-          <a:fontRef idx="minor">
-            <a:schemeClr val="lt1"/>
-          </a:fontRef>
-        </p:style>
-        <p:txBody>
-          <a:bodyPr rtlCol="0" anchor="ctr"/>
-          <a:lstStyle/>
-          <a:p>
-            <a:pPr algn="ctr"/>
-          </a:p>
-        </p:txBody>
-      </p:sp>
-      <p:sp>
-        <p:nvSpPr>
-          <p:cNvPr id="16" name="Rectangle 15"/>
-          <p:cNvSpPr/>
-          <p:nvPr/>
-        </p:nvSpPr>
-        <p:spPr>
-          <a:xfrm>
-            <a:off x="4937760" y="4379976"/>
-            <a:ext cx="128016" cy="1371600"/>
-          </a:xfrm>
-          <a:prstGeom prst="rect">
-            <a:avLst/>
-          </a:prstGeom>
-          <a:solidFill>
-            <a:srgbClr val="2E7D32"/>
-          </a:solidFill>
-          <a:ln/>
-        </p:spPr>
-        <p:style>
-          <a:lnRef idx="1">
-            <a:schemeClr val="accent1"/>
-          </a:lnRef>
-          <a:fillRef idx="3">
-            <a:schemeClr val="accent1"/>
-          </a:fillRef>
-          <a:effectRef idx="2">
-            <a:schemeClr val="accent1"/>
-          </a:effectRef>
-          <a:fontRef idx="minor">
-            <a:schemeClr val="lt1"/>
-          </a:fontRef>
-        </p:style>
-        <p:txBody>
-          <a:bodyPr rtlCol="0" anchor="ctr"/>
-          <a:lstStyle/>
-          <a:p>
-            <a:pPr algn="ctr"/>
-          </a:p>
-        </p:txBody>
-      </p:sp>
-      <p:sp>
-        <p:nvSpPr>
-          <p:cNvPr id="17" name="TextBox 16"/>
-          <p:cNvSpPr txBox="1"/>
-          <p:nvPr/>
-        </p:nvSpPr>
-        <p:spPr>
-          <a:xfrm>
-            <a:off x="5138928" y="4443984"/>
-            <a:ext cx="6675120" cy="365760"/>
-          </a:xfrm>
-          <a:prstGeom prst="rect">
-            <a:avLst/>
-          </a:prstGeom>
-          <a:noFill/>
-        </p:spPr>
-        <p:txBody>
-          <a:bodyPr wrap="square">
-            <a:spAutoFit/>
-          </a:bodyPr>
-          <a:lstStyle/>
-          <a:p>
-            <a:pPr algn="l"/>
-            <a:r>
-              <a:rPr sz="1350" b="1" i="0">
-                <a:solidFill>
-                  <a:srgbClr val="2E7D32"/>
-                </a:solidFill>
-                <a:latin typeface="Calibri"/>
-              </a:rPr>
-              <a:t>Focar onde dói rende muito mais</a:t>
-            </a:r>
-          </a:p>
-        </p:txBody>
-      </p:sp>
-      <p:sp>
-        <p:nvSpPr>
-          <p:cNvPr id="18" name="TextBox 17"/>
-          <p:cNvSpPr txBox="1"/>
-          <p:nvPr/>
-        </p:nvSpPr>
-        <p:spPr>
-          <a:xfrm>
-            <a:off x="5138928" y="4855464"/>
-            <a:ext cx="6675120" cy="841248"/>
-          </a:xfrm>
-          <a:prstGeom prst="rect">
-            <a:avLst/>
-          </a:prstGeom>
-          <a:noFill/>
-        </p:spPr>
-        <p:txBody>
-          <a:bodyPr wrap="square">
-            <a:spAutoFit/>
-          </a:bodyPr>
-          <a:lstStyle/>
-          <a:p>
-            <a:pPr algn="l"/>
-            <a:r>
-              <a:rPr sz="1200" b="0" i="0">
-                <a:solidFill>
-                  <a:srgbClr val="212121"/>
-                </a:solidFill>
-                <a:latin typeface="Calibri"/>
-              </a:rPr>
-              <a:t>Concentrar o orçamento nos estados de maior desvantagem entrega até +68% mais resultado do que espalhar o dinheiro por igual.</a:t>
-            </a:r>
-          </a:p>
-        </p:txBody>
-      </p:sp>
-      <p:sp>
-        <p:nvSpPr>
-          <p:cNvPr id="19" name="Rectangle 18"/>
-          <p:cNvSpPr/>
-          <p:nvPr/>
-        </p:nvSpPr>
-        <p:spPr>
-          <a:xfrm>
-            <a:off x="274320" y="5897880"/>
-            <a:ext cx="11612880" cy="603504"/>
-          </a:xfrm>
-          <a:prstGeom prst="rect">
-            <a:avLst/>
-          </a:prstGeom>
-          <a:solidFill>
-            <a:srgbClr val="FFF9E7"/>
-          </a:solidFill>
-          <a:ln w="15240">
-            <a:solidFill>
-              <a:srgbClr val="FF8F00"/>
-            </a:solidFill>
-          </a:ln>
-        </p:spPr>
-        <p:style>
-          <a:lnRef idx="1">
-            <a:schemeClr val="accent1"/>
-          </a:lnRef>
-          <a:fillRef idx="3">
-            <a:schemeClr val="accent1"/>
-          </a:fillRef>
-          <a:effectRef idx="2">
-            <a:schemeClr val="accent1"/>
-          </a:effectRef>
-          <a:fontRef idx="minor">
-            <a:schemeClr val="lt1"/>
-          </a:fontRef>
-        </p:style>
-        <p:txBody>
-          <a:bodyPr rtlCol="0" anchor="ctr"/>
-          <a:lstStyle/>
-          <a:p>
-            <a:pPr algn="ctr"/>
-          </a:p>
-        </p:txBody>
-      </p:sp>
-      <p:sp>
-        <p:nvSpPr>
-          <p:cNvPr id="20" name="TextBox 19"/>
-          <p:cNvSpPr txBox="1"/>
-          <p:nvPr/>
-        </p:nvSpPr>
-        <p:spPr>
-          <a:xfrm>
-            <a:off x="411480" y="5989320"/>
-            <a:ext cx="11338560" cy="420624"/>
-          </a:xfrm>
-          <a:prstGeom prst="rect">
-            <a:avLst/>
-          </a:prstGeom>
-          <a:noFill/>
-        </p:spPr>
-        <p:txBody>
-          <a:bodyPr wrap="square">
-            <a:spAutoFit/>
-          </a:bodyPr>
-          <a:lstStyle/>
-          <a:p>
-            <a:pPr algn="ctr"/>
-            <a:r>
-              <a:rPr sz="1300" b="1" i="0">
-                <a:solidFill>
-                  <a:srgbClr val="1B2A4A"/>
-                </a:solidFill>
-                <a:latin typeface="Calibri"/>
-              </a:rPr>
-              <a:t>Em linguagem simples: tratar o país inteiro igual desperdiça recursos. Levar a política primeiro aos estados ★ (DF, AM, TO, PA, AC) multiplica o impacto do mesmo orçamento.</a:t>
-            </a:r>
-          </a:p>
-        </p:txBody>
-      </p:sp>
-      <p:sp>
-        <p:nvSpPr>
-          <p:cNvPr id="21" name="Rectangle 20"/>
-          <p:cNvSpPr/>
-          <p:nvPr/>
-        </p:nvSpPr>
-        <p:spPr>
-          <a:xfrm>
-            <a:off x="0" y="6629400"/>
-            <a:ext cx="12188952" cy="228600"/>
-          </a:xfrm>
-          <a:prstGeom prst="rect">
-            <a:avLst/>
-          </a:prstGeom>
-          <a:solidFill>
-            <a:srgbClr val="1B2A4A"/>
-          </a:solidFill>
-          <a:ln/>
-        </p:spPr>
-        <p:style>
-          <a:lnRef idx="1">
-            <a:schemeClr val="accent1"/>
-          </a:lnRef>
-          <a:fillRef idx="3">
-            <a:schemeClr val="accent1"/>
-          </a:fillRef>
-          <a:effectRef idx="2">
-            <a:schemeClr val="accent1"/>
-          </a:effectRef>
-          <a:fontRef idx="minor">
-            <a:schemeClr val="lt1"/>
-          </a:fontRef>
-        </p:style>
-        <p:txBody>
-          <a:bodyPr rtlCol="0" anchor="ctr"/>
-          <a:lstStyle/>
-          <a:p>
-            <a:pPr algn="ctr"/>
-          </a:p>
-        </p:txBody>
-      </p:sp>
-      <p:sp>
-        <p:nvSpPr>
-          <p:cNvPr id="22" name="TextBox 21"/>
-          <p:cNvSpPr txBox="1"/>
-          <p:nvPr/>
-        </p:nvSpPr>
-        <p:spPr>
-          <a:xfrm>
-            <a:off x="182880" y="6647688"/>
-            <a:ext cx="10515600" cy="201168"/>
-          </a:xfrm>
-          <a:prstGeom prst="rect">
-            <a:avLst/>
-          </a:prstGeom>
-          <a:noFill/>
-        </p:spPr>
-        <p:txBody>
-          <a:bodyPr wrap="square">
-            <a:spAutoFit/>
-          </a:bodyPr>
-          <a:lstStyle/>
-          <a:p>
-            <a:pPr algn="l"/>
-            <a:r>
-              <a:rPr sz="750" b="0" i="0">
-                <a:solidFill>
-                  <a:srgbClr val="BBDEFB"/>
-                </a:solidFill>
-                <a:latin typeface="Calibri"/>
-              </a:rPr>
-              <a:t>PNAD Contínua 2016–2025  |  15,9 milhões de observações  |  Ricardo Calheiros — MBA USP/ESALQ</a:t>
-            </a:r>
-          </a:p>
-        </p:txBody>
-      </p:sp>
-      <p:sp>
-        <p:nvSpPr>
-          <p:cNvPr id="23" name="TextBox 22"/>
-          <p:cNvSpPr txBox="1"/>
-          <p:nvPr/>
-        </p:nvSpPr>
-        <p:spPr>
-          <a:xfrm>
-            <a:off x="11704320" y="6647688"/>
-            <a:ext cx="457200" cy="201168"/>
-          </a:xfrm>
-          <a:prstGeom prst="rect">
-            <a:avLst/>
-          </a:prstGeom>
-          <a:noFill/>
-        </p:spPr>
-        <p:txBody>
-          <a:bodyPr wrap="square">
-            <a:spAutoFit/>
-          </a:bodyPr>
-          <a:lstStyle/>
-          <a:p>
-            <a:pPr algn="r"/>
-            <a:r>
-              <a:rPr sz="750" b="0" i="0">
-                <a:solidFill>
-                  <a:srgbClr val="FFFFFF"/>
-                </a:solidFill>
-                <a:latin typeface="Calibri"/>
-              </a:rPr>
-              <a:t>11/14</a:t>
-            </a:r>
-          </a:p>
-        </p:txBody>
-      </p:sp>
-    </p:spTree>
-  </p:cSld>
-  <p:clrMapOvr>
-    <a:masterClrMapping/>
-  </p:clrMapOvr>
-</p:sld>
-</file>
-
-<file path=ppt/slides/slide12.xml><?xml version="1.0" encoding="utf-8"?>
-<p:sld xmlns:a="http://schemas.openxmlformats.org/drawingml/2006/main" xmlns:p="http://schemas.openxmlformats.org/presentationml/2006/main" xmlns:r="http://schemas.openxmlformats.org/officeDocument/2006/relationships">
-  <p:cSld>
-    <p:spTree>
-      <p:nvGrpSpPr>
-        <p:cNvPr id="1" name=""/>
-        <p:cNvGrpSpPr/>
-        <p:nvPr/>
-      </p:nvGrpSpPr>
-      <p:grpSpPr/>
-      <p:sp>
-        <p:nvSpPr>
-          <p:cNvPr id="2" name="Rectangle 1"/>
-          <p:cNvSpPr/>
-          <p:nvPr/>
-        </p:nvSpPr>
-        <p:spPr>
-          <a:xfrm>
-            <a:off x="0" y="0"/>
-            <a:ext cx="12188952" cy="960120"/>
-          </a:xfrm>
-          <a:prstGeom prst="rect">
-            <a:avLst/>
-          </a:prstGeom>
-          <a:solidFill>
-            <a:srgbClr val="1B2A4A"/>
-          </a:solidFill>
-          <a:ln/>
-        </p:spPr>
-        <p:style>
-          <a:lnRef idx="1">
-            <a:schemeClr val="accent1"/>
-          </a:lnRef>
-          <a:fillRef idx="3">
-            <a:schemeClr val="accent1"/>
-          </a:fillRef>
-          <a:effectRef idx="2">
-            <a:schemeClr val="accent1"/>
-          </a:effectRef>
-          <a:fontRef idx="minor">
-            <a:schemeClr val="lt1"/>
-          </a:fontRef>
-        </p:style>
-        <p:txBody>
-          <a:bodyPr rtlCol="0" anchor="ctr"/>
-          <a:lstStyle/>
-          <a:p>
-            <a:pPr algn="ctr"/>
-          </a:p>
-        </p:txBody>
-      </p:sp>
-      <p:sp>
-        <p:nvSpPr>
-          <p:cNvPr id="3" name="TextBox 2"/>
-          <p:cNvSpPr txBox="1"/>
-          <p:nvPr/>
-        </p:nvSpPr>
-        <p:spPr>
-          <a:xfrm>
-            <a:off x="320040" y="73152"/>
-            <a:ext cx="11247120" cy="502920"/>
-          </a:xfrm>
-          <a:prstGeom prst="rect">
-            <a:avLst/>
-          </a:prstGeom>
-          <a:noFill/>
-        </p:spPr>
-        <p:txBody>
-          <a:bodyPr wrap="square">
-            <a:spAutoFit/>
-          </a:bodyPr>
-          <a:lstStyle/>
-          <a:p>
-            <a:pPr algn="l"/>
-            <a:r>
-              <a:rPr sz="2600" b="1" i="0">
-                <a:solidFill>
-                  <a:srgbClr val="FFFFFF"/>
-                </a:solidFill>
-                <a:latin typeface="Calibri"/>
-              </a:rPr>
-              <a:t>O Que Funciona — Três Eixos de Ação</a:t>
-            </a:r>
-          </a:p>
-        </p:txBody>
-      </p:sp>
-      <p:sp>
-        <p:nvSpPr>
-          <p:cNvPr id="4" name="TextBox 3"/>
-          <p:cNvSpPr txBox="1"/>
-          <p:nvPr/>
-        </p:nvSpPr>
-        <p:spPr>
-          <a:xfrm>
-            <a:off x="320040" y="576072"/>
-            <a:ext cx="11247120" cy="320040"/>
-          </a:xfrm>
-          <a:prstGeom prst="rect">
-            <a:avLst/>
-          </a:prstGeom>
-          <a:noFill/>
-        </p:spPr>
-        <p:txBody>
-          <a:bodyPr wrap="square">
-            <a:spAutoFit/>
-          </a:bodyPr>
-          <a:lstStyle/>
-          <a:p>
-            <a:pPr algn="l"/>
-            <a:r>
-              <a:rPr sz="1300" b="0" i="0">
-                <a:solidFill>
-                  <a:srgbClr val="BBDEFB"/>
-                </a:solidFill>
-                <a:latin typeface="Calibri"/>
-              </a:rPr>
-              <a:t>Nenhum eixo isolado resolve. Os três precisam atuar simultaneamente.</a:t>
-            </a:r>
-          </a:p>
-        </p:txBody>
-      </p:sp>
-      <p:sp>
-        <p:nvSpPr>
-          <p:cNvPr id="5" name="Rectangle 4"/>
-          <p:cNvSpPr/>
-          <p:nvPr/>
-        </p:nvSpPr>
-        <p:spPr>
-          <a:xfrm>
-            <a:off x="274320" y="1097280"/>
-            <a:ext cx="3749039" cy="5349240"/>
-          </a:xfrm>
-          <a:prstGeom prst="rect">
-            <a:avLst/>
-          </a:prstGeom>
-          <a:solidFill>
-            <a:srgbClr val="F5F5F5"/>
-          </a:solidFill>
-          <a:ln w="25400">
-            <a:solidFill>
-              <a:srgbClr val="C62828"/>
-            </a:solidFill>
-          </a:ln>
-        </p:spPr>
-        <p:style>
-          <a:lnRef idx="1">
-            <a:schemeClr val="accent1"/>
-          </a:lnRef>
-          <a:fillRef idx="3">
-            <a:schemeClr val="accent1"/>
-          </a:fillRef>
-          <a:effectRef idx="2">
-            <a:schemeClr val="accent1"/>
-          </a:effectRef>
-          <a:fontRef idx="minor">
-            <a:schemeClr val="lt1"/>
-          </a:fontRef>
-        </p:style>
-        <p:txBody>
-          <a:bodyPr rtlCol="0" anchor="ctr"/>
-          <a:lstStyle/>
-          <a:p>
-            <a:pPr algn="ctr"/>
-          </a:p>
-        </p:txBody>
-      </p:sp>
-      <p:sp>
-        <p:nvSpPr>
-          <p:cNvPr id="6" name="Rectangle 5"/>
-          <p:cNvSpPr/>
-          <p:nvPr/>
-        </p:nvSpPr>
-        <p:spPr>
-          <a:xfrm>
-            <a:off x="274320" y="1097280"/>
-            <a:ext cx="3749039" cy="502920"/>
-          </a:xfrm>
-          <a:prstGeom prst="rect">
-            <a:avLst/>
-          </a:prstGeom>
-          <a:solidFill>
-            <a:srgbClr val="C62828"/>
-          </a:solidFill>
-          <a:ln/>
-        </p:spPr>
-        <p:style>
-          <a:lnRef idx="1">
-            <a:schemeClr val="accent1"/>
-          </a:lnRef>
-          <a:fillRef idx="3">
-            <a:schemeClr val="accent1"/>
-          </a:fillRef>
-          <a:effectRef idx="2">
-            <a:schemeClr val="accent1"/>
-          </a:effectRef>
-          <a:fontRef idx="minor">
-            <a:schemeClr val="lt1"/>
-          </a:fontRef>
-        </p:style>
-        <p:txBody>
-          <a:bodyPr rtlCol="0" anchor="ctr"/>
-          <a:lstStyle/>
-          <a:p>
-            <a:pPr algn="ctr"/>
-          </a:p>
-        </p:txBody>
-      </p:sp>
-      <p:sp>
-        <p:nvSpPr>
-          <p:cNvPr id="7" name="TextBox 6"/>
-          <p:cNvSpPr txBox="1"/>
-          <p:nvPr/>
-        </p:nvSpPr>
-        <p:spPr>
-          <a:xfrm>
-            <a:off x="384048" y="1124712"/>
-            <a:ext cx="3529584" cy="457200"/>
-          </a:xfrm>
-          <a:prstGeom prst="rect">
-            <a:avLst/>
-          </a:prstGeom>
-          <a:noFill/>
-        </p:spPr>
-        <p:txBody>
-          <a:bodyPr wrap="square">
-            <a:spAutoFit/>
-          </a:bodyPr>
-          <a:lstStyle/>
-          <a:p>
-            <a:pPr algn="l"/>
-            <a:r>
-              <a:rPr sz="1500" b="1" i="0">
-                <a:solidFill>
-                  <a:srgbClr val="FFFFFF"/>
-                </a:solidFill>
-                <a:latin typeface="Calibri"/>
-              </a:rPr>
-              <a:t>Abrir as Portas</a:t>
-            </a:r>
-          </a:p>
-        </p:txBody>
-      </p:sp>
-      <p:sp>
-        <p:nvSpPr>
-          <p:cNvPr id="8" name="TextBox 7"/>
-          <p:cNvSpPr txBox="1"/>
-          <p:nvPr/>
-        </p:nvSpPr>
-        <p:spPr>
-          <a:xfrm>
-            <a:off x="457200" y="1691640"/>
-            <a:ext cx="3383280" cy="1097280"/>
-          </a:xfrm>
-          <a:prstGeom prst="rect">
-            <a:avLst/>
-          </a:prstGeom>
-          <a:noFill/>
-        </p:spPr>
-        <p:txBody>
-          <a:bodyPr wrap="square">
-            <a:spAutoFit/>
-          </a:bodyPr>
-          <a:lstStyle/>
-          <a:p>
-            <a:pPr algn="l"/>
-            <a:r>
-              <a:rPr sz="1200" b="0" i="0">
-                <a:solidFill>
-                  <a:srgbClr val="212121"/>
-                </a:solidFill>
-                <a:latin typeface="Calibri"/>
-              </a:rPr>
-              <a:t>Ação 1:
-Cotas de acesso a cargos
-qualificados (meta: IR ≥ 0,80)</a:t>
-            </a:r>
-          </a:p>
-        </p:txBody>
-      </p:sp>
-      <p:sp>
-        <p:nvSpPr>
-          <p:cNvPr id="9" name="Rectangle 8"/>
-          <p:cNvSpPr/>
-          <p:nvPr/>
-        </p:nvSpPr>
-        <p:spPr>
-          <a:xfrm>
-            <a:off x="457200" y="2834640"/>
-            <a:ext cx="3383280" cy="18288"/>
-          </a:xfrm>
-          <a:prstGeom prst="rect">
-            <a:avLst/>
-          </a:prstGeom>
-          <a:solidFill>
-            <a:srgbClr val="C62828"/>
-          </a:solidFill>
-          <a:ln/>
-        </p:spPr>
-        <p:style>
-          <a:lnRef idx="1">
-            <a:schemeClr val="accent1"/>
-          </a:lnRef>
-          <a:fillRef idx="3">
-            <a:schemeClr val="accent1"/>
-          </a:fillRef>
-          <a:effectRef idx="2">
-            <a:schemeClr val="accent1"/>
-          </a:effectRef>
-          <a:fontRef idx="minor">
-            <a:schemeClr val="lt1"/>
-          </a:fontRef>
-        </p:style>
-        <p:txBody>
-          <a:bodyPr rtlCol="0" anchor="ctr"/>
-          <a:lstStyle/>
-          <a:p>
-            <a:pPr algn="ctr"/>
-          </a:p>
-        </p:txBody>
-      </p:sp>
-      <p:sp>
-        <p:nvSpPr>
-          <p:cNvPr id="10" name="TextBox 9"/>
-          <p:cNvSpPr txBox="1"/>
-          <p:nvPr/>
-        </p:nvSpPr>
-        <p:spPr>
-          <a:xfrm>
-            <a:off x="457200" y="2926080"/>
-            <a:ext cx="3383280" cy="1097280"/>
-          </a:xfrm>
-          <a:prstGeom prst="rect">
-            <a:avLst/>
-          </a:prstGeom>
-          <a:noFill/>
-        </p:spPr>
-        <p:txBody>
-          <a:bodyPr wrap="square">
-            <a:spAutoFit/>
-          </a:bodyPr>
-          <a:lstStyle/>
-          <a:p>
-            <a:pPr algn="l"/>
-            <a:r>
-              <a:rPr sz="1200" b="0" i="0">
-                <a:solidFill>
-                  <a:srgbClr val="212121"/>
-                </a:solidFill>
-                <a:latin typeface="Calibri"/>
-              </a:rPr>
-              <a:t>Ação 2:
-Formação profissional com
-recorte racial e bolsas de
-residência em empresas premium</a:t>
-            </a:r>
-          </a:p>
-        </p:txBody>
-      </p:sp>
-      <p:sp>
-        <p:nvSpPr>
-          <p:cNvPr id="11" name="Rectangle 10"/>
-          <p:cNvSpPr/>
-          <p:nvPr/>
-        </p:nvSpPr>
-        <p:spPr>
-          <a:xfrm>
-            <a:off x="365760" y="4114800"/>
-            <a:ext cx="3566160" cy="18288"/>
-          </a:xfrm>
-          <a:prstGeom prst="rect">
-            <a:avLst/>
-          </a:prstGeom>
-          <a:solidFill>
-            <a:srgbClr val="C62828"/>
-          </a:solidFill>
-          <a:ln/>
-        </p:spPr>
-        <p:style>
-          <a:lnRef idx="1">
-            <a:schemeClr val="accent1"/>
-          </a:lnRef>
-          <a:fillRef idx="3">
-            <a:schemeClr val="accent1"/>
-          </a:fillRef>
-          <a:effectRef idx="2">
-            <a:schemeClr val="accent1"/>
-          </a:effectRef>
-          <a:fontRef idx="minor">
-            <a:schemeClr val="lt1"/>
-          </a:fontRef>
-        </p:style>
-        <p:txBody>
-          <a:bodyPr rtlCol="0" anchor="ctr"/>
-          <a:lstStyle/>
-          <a:p>
-            <a:pPr algn="ctr"/>
-          </a:p>
-        </p:txBody>
-      </p:sp>
-      <p:sp>
-        <p:nvSpPr>
-          <p:cNvPr id="12" name="TextBox 11"/>
-          <p:cNvSpPr txBox="1"/>
-          <p:nvPr/>
-        </p:nvSpPr>
-        <p:spPr>
-          <a:xfrm>
-            <a:off x="411480" y="4206240"/>
-            <a:ext cx="3474720" cy="640080"/>
-          </a:xfrm>
-          <a:prstGeom prst="rect">
-            <a:avLst/>
-          </a:prstGeom>
-          <a:noFill/>
-        </p:spPr>
-        <p:txBody>
-          <a:bodyPr wrap="square">
-            <a:spAutoFit/>
-          </a:bodyPr>
-          <a:lstStyle/>
-          <a:p>
-            <a:pPr algn="l"/>
-            <a:r>
-              <a:rPr sz="1100" b="1" i="1">
-                <a:solidFill>
-                  <a:srgbClr val="C62828"/>
-                </a:solidFill>
-                <a:latin typeface="Calibri"/>
-              </a:rPr>
-              <a:t>Atacar onde os dados apontam:
-barreiras de ACESSO, não só salário</a:t>
-            </a:r>
-          </a:p>
-        </p:txBody>
-      </p:sp>
-      <p:sp>
-        <p:nvSpPr>
-          <p:cNvPr id="13" name="Rectangle 12"/>
-          <p:cNvSpPr/>
-          <p:nvPr/>
-        </p:nvSpPr>
-        <p:spPr>
-          <a:xfrm>
-            <a:off x="4251959" y="1097280"/>
-            <a:ext cx="3749039" cy="5349240"/>
-          </a:xfrm>
-          <a:prstGeom prst="rect">
-            <a:avLst/>
-          </a:prstGeom>
-          <a:solidFill>
-            <a:srgbClr val="F5F5F5"/>
-          </a:solidFill>
-          <a:ln w="25400">
-            <a:solidFill>
-              <a:srgbClr val="1565C0"/>
-            </a:solidFill>
-          </a:ln>
-        </p:spPr>
-        <p:style>
-          <a:lnRef idx="1">
-            <a:schemeClr val="accent1"/>
-          </a:lnRef>
-          <a:fillRef idx="3">
-            <a:schemeClr val="accent1"/>
-          </a:fillRef>
-          <a:effectRef idx="2">
-            <a:schemeClr val="accent1"/>
-          </a:effectRef>
-          <a:fontRef idx="minor">
-            <a:schemeClr val="lt1"/>
-          </a:fontRef>
-        </p:style>
-        <p:txBody>
-          <a:bodyPr rtlCol="0" anchor="ctr"/>
-          <a:lstStyle/>
-          <a:p>
-            <a:pPr algn="ctr"/>
-          </a:p>
-        </p:txBody>
-      </p:sp>
-      <p:sp>
-        <p:nvSpPr>
-          <p:cNvPr id="14" name="Rectangle 13"/>
-          <p:cNvSpPr/>
-          <p:nvPr/>
-        </p:nvSpPr>
-        <p:spPr>
-          <a:xfrm>
-            <a:off x="4251959" y="1097280"/>
-            <a:ext cx="3749039" cy="502920"/>
-          </a:xfrm>
-          <a:prstGeom prst="rect">
-            <a:avLst/>
-          </a:prstGeom>
-          <a:solidFill>
-            <a:srgbClr val="1565C0"/>
-          </a:solidFill>
-          <a:ln/>
-        </p:spPr>
-        <p:style>
-          <a:lnRef idx="1">
-            <a:schemeClr val="accent1"/>
-          </a:lnRef>
-          <a:fillRef idx="3">
-            <a:schemeClr val="accent1"/>
-          </a:fillRef>
-          <a:effectRef idx="2">
-            <a:schemeClr val="accent1"/>
-          </a:effectRef>
-          <a:fontRef idx="minor">
-            <a:schemeClr val="lt1"/>
-          </a:fontRef>
-        </p:style>
-        <p:txBody>
-          <a:bodyPr rtlCol="0" anchor="ctr"/>
-          <a:lstStyle/>
-          <a:p>
-            <a:pPr algn="ctr"/>
-          </a:p>
-        </p:txBody>
-      </p:sp>
-      <p:sp>
-        <p:nvSpPr>
-          <p:cNvPr id="15" name="TextBox 14"/>
-          <p:cNvSpPr txBox="1"/>
-          <p:nvPr/>
-        </p:nvSpPr>
-        <p:spPr>
-          <a:xfrm>
-            <a:off x="4361687" y="1124712"/>
-            <a:ext cx="3529584" cy="457200"/>
-          </a:xfrm>
-          <a:prstGeom prst="rect">
-            <a:avLst/>
-          </a:prstGeom>
-          <a:noFill/>
-        </p:spPr>
-        <p:txBody>
-          <a:bodyPr wrap="square">
-            <a:spAutoFit/>
-          </a:bodyPr>
-          <a:lstStyle/>
-          <a:p>
-            <a:pPr algn="l"/>
-            <a:r>
-              <a:rPr sz="1500" b="1" i="0">
-                <a:solidFill>
-                  <a:srgbClr val="FFFFFF"/>
-                </a:solidFill>
-                <a:latin typeface="Calibri"/>
-              </a:rPr>
-              <a:t>Pagar Igual</a:t>
-            </a:r>
-          </a:p>
-        </p:txBody>
-      </p:sp>
-      <p:sp>
-        <p:nvSpPr>
-          <p:cNvPr id="16" name="TextBox 15"/>
-          <p:cNvSpPr txBox="1"/>
-          <p:nvPr/>
-        </p:nvSpPr>
-        <p:spPr>
-          <a:xfrm>
-            <a:off x="4434839" y="1691640"/>
-            <a:ext cx="3383280" cy="1097280"/>
-          </a:xfrm>
-          <a:prstGeom prst="rect">
-            <a:avLst/>
-          </a:prstGeom>
-          <a:noFill/>
-        </p:spPr>
-        <p:txBody>
-          <a:bodyPr wrap="square">
-            <a:spAutoFit/>
-          </a:bodyPr>
-          <a:lstStyle/>
-          <a:p>
-            <a:pPr algn="l"/>
-            <a:r>
-              <a:rPr sz="1200" b="0" i="0">
-                <a:solidFill>
-                  <a:srgbClr val="212121"/>
-                </a:solidFill>
-                <a:latin typeface="Calibri"/>
-              </a:rPr>
-              <a:t>Ação 1:
-Transparência salarial por raça
-obrigatória (empresas &gt; 100 fun.)</a:t>
-            </a:r>
-          </a:p>
-        </p:txBody>
-      </p:sp>
-      <p:sp>
-        <p:nvSpPr>
-          <p:cNvPr id="17" name="Rectangle 16"/>
-          <p:cNvSpPr/>
-          <p:nvPr/>
-        </p:nvSpPr>
-        <p:spPr>
-          <a:xfrm>
-            <a:off x="4434839" y="2834640"/>
-            <a:ext cx="3383280" cy="18288"/>
-          </a:xfrm>
-          <a:prstGeom prst="rect">
-            <a:avLst/>
-          </a:prstGeom>
-          <a:solidFill>
-            <a:srgbClr val="1565C0"/>
-          </a:solidFill>
-          <a:ln/>
-        </p:spPr>
-        <p:style>
-          <a:lnRef idx="1">
-            <a:schemeClr val="accent1"/>
-          </a:lnRef>
-          <a:fillRef idx="3">
-            <a:schemeClr val="accent1"/>
-          </a:fillRef>
-          <a:effectRef idx="2">
-            <a:schemeClr val="accent1"/>
-          </a:effectRef>
-          <a:fontRef idx="minor">
-            <a:schemeClr val="lt1"/>
-          </a:fontRef>
-        </p:style>
-        <p:txBody>
-          <a:bodyPr rtlCol="0" anchor="ctr"/>
-          <a:lstStyle/>
-          <a:p>
-            <a:pPr algn="ctr"/>
-          </a:p>
-        </p:txBody>
-      </p:sp>
-      <p:sp>
-        <p:nvSpPr>
-          <p:cNvPr id="18" name="TextBox 17"/>
-          <p:cNvSpPr txBox="1"/>
-          <p:nvPr/>
-        </p:nvSpPr>
-        <p:spPr>
-          <a:xfrm>
-            <a:off x="4434839" y="2926080"/>
-            <a:ext cx="3383280" cy="1097280"/>
-          </a:xfrm>
-          <a:prstGeom prst="rect">
-            <a:avLst/>
-          </a:prstGeom>
-          <a:noFill/>
-        </p:spPr>
-        <p:txBody>
-          <a:bodyPr wrap="square">
-            <a:spAutoFit/>
-          </a:bodyPr>
-          <a:lstStyle/>
-          <a:p>
-            <a:pPr algn="l"/>
-            <a:r>
-              <a:rPr sz="1200" b="0" i="0">
-                <a:solidFill>
-                  <a:srgbClr val="212121"/>
-                </a:solidFill>
-                <a:latin typeface="Calibri"/>
-              </a:rPr>
-              <a:t>Ação 2:
-Auditoria de igual pagamento
-por trabalho igual com
-penalidades progressivas</a:t>
-            </a:r>
-          </a:p>
-        </p:txBody>
-      </p:sp>
-      <p:sp>
-        <p:nvSpPr>
-          <p:cNvPr id="19" name="Rectangle 18"/>
-          <p:cNvSpPr/>
-          <p:nvPr/>
-        </p:nvSpPr>
-        <p:spPr>
-          <a:xfrm>
-            <a:off x="4343399" y="4114800"/>
-            <a:ext cx="3566160" cy="18288"/>
-          </a:xfrm>
-          <a:prstGeom prst="rect">
-            <a:avLst/>
-          </a:prstGeom>
-          <a:solidFill>
-            <a:srgbClr val="1565C0"/>
-          </a:solidFill>
-          <a:ln/>
-        </p:spPr>
-        <p:style>
-          <a:lnRef idx="1">
-            <a:schemeClr val="accent1"/>
-          </a:lnRef>
-          <a:fillRef idx="3">
-            <a:schemeClr val="accent1"/>
-          </a:fillRef>
-          <a:effectRef idx="2">
-            <a:schemeClr val="accent1"/>
-          </a:effectRef>
-          <a:fontRef idx="minor">
-            <a:schemeClr val="lt1"/>
-          </a:fontRef>
-        </p:style>
-        <p:txBody>
-          <a:bodyPr rtlCol="0" anchor="ctr"/>
-          <a:lstStyle/>
-          <a:p>
-            <a:pPr algn="ctr"/>
-          </a:p>
-        </p:txBody>
-      </p:sp>
-      <p:sp>
-        <p:nvSpPr>
-          <p:cNvPr id="20" name="TextBox 19"/>
-          <p:cNvSpPr txBox="1"/>
-          <p:nvPr/>
-        </p:nvSpPr>
-        <p:spPr>
-          <a:xfrm>
-            <a:off x="4389119" y="4206240"/>
-            <a:ext cx="3474720" cy="640080"/>
-          </a:xfrm>
-          <a:prstGeom prst="rect">
-            <a:avLst/>
-          </a:prstGeom>
-          <a:noFill/>
-        </p:spPr>
-        <p:txBody>
-          <a:bodyPr wrap="square">
-            <a:spAutoFit/>
-          </a:bodyPr>
-          <a:lstStyle/>
-          <a:p>
-            <a:pPr algn="l"/>
-            <a:r>
-              <a:rPr sz="1100" b="1" i="1">
-                <a:solidFill>
-                  <a:srgbClr val="1565C0"/>
-                </a:solidFill>
-                <a:latin typeface="Calibri"/>
-              </a:rPr>
-              <a:t>O gap residual de 6,2% é real
-e mensurável — e deve ser eliminado</a:t>
-            </a:r>
-          </a:p>
-        </p:txBody>
-      </p:sp>
-      <p:sp>
-        <p:nvSpPr>
-          <p:cNvPr id="21" name="Rectangle 20"/>
-          <p:cNvSpPr/>
-          <p:nvPr/>
-        </p:nvSpPr>
-        <p:spPr>
-          <a:xfrm>
-            <a:off x="8229598" y="1097280"/>
-            <a:ext cx="3749039" cy="5349240"/>
-          </a:xfrm>
-          <a:prstGeom prst="rect">
-            <a:avLst/>
-          </a:prstGeom>
-          <a:solidFill>
-            <a:srgbClr val="F5F5F5"/>
-          </a:solidFill>
-          <a:ln w="25400">
-            <a:solidFill>
-              <a:srgbClr val="2E7D32"/>
-            </a:solidFill>
-          </a:ln>
-        </p:spPr>
-        <p:style>
-          <a:lnRef idx="1">
-            <a:schemeClr val="accent1"/>
-          </a:lnRef>
-          <a:fillRef idx="3">
-            <a:schemeClr val="accent1"/>
-          </a:fillRef>
-          <a:effectRef idx="2">
-            <a:schemeClr val="accent1"/>
-          </a:effectRef>
-          <a:fontRef idx="minor">
-            <a:schemeClr val="lt1"/>
-          </a:fontRef>
-        </p:style>
-        <p:txBody>
-          <a:bodyPr rtlCol="0" anchor="ctr"/>
-          <a:lstStyle/>
-          <a:p>
-            <a:pPr algn="ctr"/>
-          </a:p>
-        </p:txBody>
-      </p:sp>
-      <p:sp>
-        <p:nvSpPr>
-          <p:cNvPr id="22" name="Rectangle 21"/>
-          <p:cNvSpPr/>
-          <p:nvPr/>
-        </p:nvSpPr>
-        <p:spPr>
-          <a:xfrm>
-            <a:off x="8229598" y="1097280"/>
-            <a:ext cx="3749039" cy="502920"/>
-          </a:xfrm>
-          <a:prstGeom prst="rect">
-            <a:avLst/>
-          </a:prstGeom>
-          <a:solidFill>
-            <a:srgbClr val="2E7D32"/>
-          </a:solidFill>
-          <a:ln/>
-        </p:spPr>
-        <p:style>
-          <a:lnRef idx="1">
-            <a:schemeClr val="accent1"/>
-          </a:lnRef>
-          <a:fillRef idx="3">
-            <a:schemeClr val="accent1"/>
-          </a:fillRef>
-          <a:effectRef idx="2">
-            <a:schemeClr val="accent1"/>
-          </a:effectRef>
-          <a:fontRef idx="minor">
-            <a:schemeClr val="lt1"/>
-          </a:fontRef>
-        </p:style>
-        <p:txBody>
-          <a:bodyPr rtlCol="0" anchor="ctr"/>
-          <a:lstStyle/>
-          <a:p>
-            <a:pPr algn="ctr"/>
-          </a:p>
-        </p:txBody>
-      </p:sp>
-      <p:sp>
-        <p:nvSpPr>
-          <p:cNvPr id="23" name="TextBox 22"/>
-          <p:cNvSpPr txBox="1"/>
-          <p:nvPr/>
-        </p:nvSpPr>
-        <p:spPr>
-          <a:xfrm>
-            <a:off x="8339326" y="1124712"/>
-            <a:ext cx="3529584" cy="457200"/>
-          </a:xfrm>
-          <a:prstGeom prst="rect">
-            <a:avLst/>
-          </a:prstGeom>
-          <a:noFill/>
-        </p:spPr>
-        <p:txBody>
-          <a:bodyPr wrap="square">
-            <a:spAutoFit/>
-          </a:bodyPr>
-          <a:lstStyle/>
-          <a:p>
-            <a:pPr algn="l"/>
-            <a:r>
-              <a:rPr sz="1500" b="1" i="0">
-                <a:solidFill>
-                  <a:srgbClr val="FFFFFF"/>
-                </a:solidFill>
-                <a:latin typeface="Calibri"/>
-              </a:rPr>
-              <a:t>Ampliar as Redes</a:t>
-            </a:r>
-          </a:p>
-        </p:txBody>
-      </p:sp>
-      <p:sp>
-        <p:nvSpPr>
-          <p:cNvPr id="24" name="TextBox 23"/>
-          <p:cNvSpPr txBox="1"/>
-          <p:nvPr/>
-        </p:nvSpPr>
-        <p:spPr>
-          <a:xfrm>
-            <a:off x="8412478" y="1691640"/>
-            <a:ext cx="3383280" cy="1097280"/>
-          </a:xfrm>
-          <a:prstGeom prst="rect">
-            <a:avLst/>
-          </a:prstGeom>
-          <a:noFill/>
-        </p:spPr>
-        <p:txBody>
-          <a:bodyPr wrap="square">
-            <a:spAutoFit/>
-          </a:bodyPr>
-          <a:lstStyle/>
-          <a:p>
-            <a:pPr algn="l"/>
-            <a:r>
-              <a:rPr sz="1200" b="0" i="0">
-                <a:solidFill>
-                  <a:srgbClr val="212121"/>
-                </a:solidFill>
-                <a:latin typeface="Calibri"/>
-              </a:rPr>
-              <a:t>Ação 1:
-Mentoria estruturada para elevar
-a posição de negros nas redes
-profissionais</a:t>
-            </a:r>
-          </a:p>
-        </p:txBody>
-      </p:sp>
-      <p:sp>
-        <p:nvSpPr>
-          <p:cNvPr id="25" name="Rectangle 24"/>
-          <p:cNvSpPr/>
-          <p:nvPr/>
-        </p:nvSpPr>
-        <p:spPr>
-          <a:xfrm>
-            <a:off x="8412478" y="2834640"/>
-            <a:ext cx="3383280" cy="18288"/>
-          </a:xfrm>
-          <a:prstGeom prst="rect">
-            <a:avLst/>
-          </a:prstGeom>
-          <a:solidFill>
-            <a:srgbClr val="2E7D32"/>
-          </a:solidFill>
-          <a:ln/>
-        </p:spPr>
-        <p:style>
-          <a:lnRef idx="1">
-            <a:schemeClr val="accent1"/>
-          </a:lnRef>
-          <a:fillRef idx="3">
-            <a:schemeClr val="accent1"/>
-          </a:fillRef>
-          <a:effectRef idx="2">
-            <a:schemeClr val="accent1"/>
-          </a:effectRef>
-          <a:fontRef idx="minor">
-            <a:schemeClr val="lt1"/>
-          </a:fontRef>
-        </p:style>
-        <p:txBody>
-          <a:bodyPr rtlCol="0" anchor="ctr"/>
-          <a:lstStyle/>
-          <a:p>
-            <a:pPr algn="ctr"/>
-          </a:p>
-        </p:txBody>
-      </p:sp>
-      <p:sp>
-        <p:nvSpPr>
-          <p:cNvPr id="26" name="TextBox 25"/>
-          <p:cNvSpPr txBox="1"/>
-          <p:nvPr/>
-        </p:nvSpPr>
-        <p:spPr>
-          <a:xfrm>
-            <a:off x="8412478" y="2926080"/>
-            <a:ext cx="3383280" cy="1097280"/>
-          </a:xfrm>
-          <a:prstGeom prst="rect">
-            <a:avLst/>
-          </a:prstGeom>
-          <a:noFill/>
-        </p:spPr>
-        <p:txBody>
-          <a:bodyPr wrap="square">
-            <a:spAutoFit/>
-          </a:bodyPr>
-          <a:lstStyle/>
-          <a:p>
-            <a:pPr algn="l"/>
-            <a:r>
-              <a:rPr sz="1200" b="0" i="0">
-                <a:solidFill>
-                  <a:srgbClr val="212121"/>
-                </a:solidFill>
-                <a:latin typeface="Calibri"/>
-              </a:rPr>
-              <a:t>Ação 2:
-30% dos cargos de liderança
-(DAS + corporativo) para negros
-até 2030</a:t>
-            </a:r>
-          </a:p>
-        </p:txBody>
-      </p:sp>
-      <p:sp>
-        <p:nvSpPr>
-          <p:cNvPr id="27" name="Rectangle 26"/>
-          <p:cNvSpPr/>
-          <p:nvPr/>
-        </p:nvSpPr>
-        <p:spPr>
-          <a:xfrm>
-            <a:off x="8321038" y="4114800"/>
-            <a:ext cx="3566160" cy="18288"/>
-          </a:xfrm>
-          <a:prstGeom prst="rect">
-            <a:avLst/>
-          </a:prstGeom>
-          <a:solidFill>
-            <a:srgbClr val="2E7D32"/>
-          </a:solidFill>
-          <a:ln/>
-        </p:spPr>
-        <p:style>
-          <a:lnRef idx="1">
-            <a:schemeClr val="accent1"/>
-          </a:lnRef>
-          <a:fillRef idx="3">
-            <a:schemeClr val="accent1"/>
-          </a:fillRef>
-          <a:effectRef idx="2">
-            <a:schemeClr val="accent1"/>
-          </a:effectRef>
-          <a:fontRef idx="minor">
-            <a:schemeClr val="lt1"/>
-          </a:fontRef>
-        </p:style>
-        <p:txBody>
-          <a:bodyPr rtlCol="0" anchor="ctr"/>
-          <a:lstStyle/>
-          <a:p>
-            <a:pPr algn="ctr"/>
-          </a:p>
-        </p:txBody>
-      </p:sp>
-      <p:sp>
-        <p:nvSpPr>
-          <p:cNvPr id="28" name="TextBox 27"/>
-          <p:cNvSpPr txBox="1"/>
-          <p:nvPr/>
-        </p:nvSpPr>
-        <p:spPr>
-          <a:xfrm>
-            <a:off x="8366758" y="4206240"/>
-            <a:ext cx="3474720" cy="640080"/>
-          </a:xfrm>
-          <a:prstGeom prst="rect">
-            <a:avLst/>
-          </a:prstGeom>
-          <a:noFill/>
-        </p:spPr>
-        <p:txBody>
-          <a:bodyPr wrap="square">
-            <a:spAutoFit/>
-          </a:bodyPr>
-          <a:lstStyle/>
-          <a:p>
-            <a:pPr algn="l"/>
-            <a:r>
-              <a:rPr sz="1100" b="1" i="1">
-                <a:solidFill>
-                  <a:srgbClr val="2E7D32"/>
-                </a:solidFill>
-                <a:latin typeface="Calibri"/>
-              </a:rPr>
-              <a:t>Sem acesso às redes que convertem
-diplomas em empregos, nada muda</a:t>
-            </a:r>
-          </a:p>
-        </p:txBody>
-      </p:sp>
-      <p:sp>
-        <p:nvSpPr>
-          <p:cNvPr id="29" name="TextBox 28"/>
-          <p:cNvSpPr txBox="1"/>
-          <p:nvPr/>
-        </p:nvSpPr>
-        <p:spPr>
-          <a:xfrm>
-            <a:off x="274320" y="6355080"/>
-            <a:ext cx="11612880" cy="347472"/>
-          </a:xfrm>
-          <a:prstGeom prst="rect">
-            <a:avLst/>
-          </a:prstGeom>
-          <a:noFill/>
-        </p:spPr>
-        <p:txBody>
-          <a:bodyPr wrap="square">
-            <a:spAutoFit/>
-          </a:bodyPr>
-          <a:lstStyle/>
-          <a:p>
-            <a:pPr algn="ctr"/>
-            <a:r>
-              <a:rPr sz="1300" b="1" i="0">
-                <a:solidFill>
-                  <a:srgbClr val="C62828"/>
-                </a:solidFill>
-                <a:latin typeface="Calibri"/>
-              </a:rPr>
-              <a:t>⚠  Sem ação simultânea nos três eixos, fechar o gap levará mais de 100 anos no ritmo atual.</a:t>
-            </a:r>
-          </a:p>
-        </p:txBody>
-      </p:sp>
-      <p:sp>
-        <p:nvSpPr>
-          <p:cNvPr id="30" name="Rectangle 29"/>
-          <p:cNvSpPr/>
-          <p:nvPr/>
-        </p:nvSpPr>
-        <p:spPr>
-          <a:xfrm>
-            <a:off x="0" y="6629400"/>
-            <a:ext cx="12188952" cy="228600"/>
-          </a:xfrm>
-          <a:prstGeom prst="rect">
-            <a:avLst/>
-          </a:prstGeom>
-          <a:solidFill>
-            <a:srgbClr val="1B2A4A"/>
-          </a:solidFill>
-          <a:ln/>
-        </p:spPr>
-        <p:style>
-          <a:lnRef idx="1">
-            <a:schemeClr val="accent1"/>
-          </a:lnRef>
-          <a:fillRef idx="3">
-            <a:schemeClr val="accent1"/>
-          </a:fillRef>
-          <a:effectRef idx="2">
-            <a:schemeClr val="accent1"/>
-          </a:effectRef>
-          <a:fontRef idx="minor">
-            <a:schemeClr val="lt1"/>
-          </a:fontRef>
-        </p:style>
-        <p:txBody>
-          <a:bodyPr rtlCol="0" anchor="ctr"/>
-          <a:lstStyle/>
-          <a:p>
-            <a:pPr algn="ctr"/>
-          </a:p>
-        </p:txBody>
-      </p:sp>
-      <p:sp>
-        <p:nvSpPr>
-          <p:cNvPr id="31" name="TextBox 30"/>
-          <p:cNvSpPr txBox="1"/>
-          <p:nvPr/>
-        </p:nvSpPr>
-        <p:spPr>
-          <a:xfrm>
-            <a:off x="182880" y="6647688"/>
-            <a:ext cx="10515600" cy="201168"/>
-          </a:xfrm>
-          <a:prstGeom prst="rect">
-            <a:avLst/>
-          </a:prstGeom>
-          <a:noFill/>
-        </p:spPr>
-        <p:txBody>
-          <a:bodyPr wrap="square">
-            <a:spAutoFit/>
-          </a:bodyPr>
-          <a:lstStyle/>
-          <a:p>
-            <a:pPr algn="l"/>
-            <a:r>
-              <a:rPr sz="750" b="0" i="0">
-                <a:solidFill>
-                  <a:srgbClr val="BBDEFB"/>
-                </a:solidFill>
-                <a:latin typeface="Calibri"/>
-              </a:rPr>
-              <a:t>PNAD Contínua 2016–2025  |  15,9 milhões de observações  |  Ricardo Calheiros — MBA USP/ESALQ</a:t>
-            </a:r>
-          </a:p>
-        </p:txBody>
-      </p:sp>
-      <p:sp>
-        <p:nvSpPr>
-          <p:cNvPr id="32" name="TextBox 31"/>
-          <p:cNvSpPr txBox="1"/>
-          <p:nvPr/>
-        </p:nvSpPr>
-        <p:spPr>
-          <a:xfrm>
-            <a:off x="11704320" y="6647688"/>
-            <a:ext cx="457200" cy="201168"/>
-          </a:xfrm>
-          <a:prstGeom prst="rect">
-            <a:avLst/>
-          </a:prstGeom>
-          <a:noFill/>
-        </p:spPr>
-        <p:txBody>
-          <a:bodyPr wrap="square">
-            <a:spAutoFit/>
-          </a:bodyPr>
-          <a:lstStyle/>
-          <a:p>
-            <a:pPr algn="r"/>
-            <a:r>
-              <a:rPr sz="750" b="0" i="0">
-                <a:solidFill>
-                  <a:srgbClr val="FFFFFF"/>
-                </a:solidFill>
-                <a:latin typeface="Calibri"/>
-              </a:rPr>
-              <a:t>12/14</a:t>
-            </a:r>
-          </a:p>
-        </p:txBody>
-      </p:sp>
-    </p:spTree>
-  </p:cSld>
-  <p:clrMapOvr>
-    <a:masterClrMapping/>
-  </p:clrMapOvr>
-</p:sld>
-</file>
-
-<file path=ppt/slides/slide13.xml><?xml version="1.0" encoding="utf-8"?>
-<p:sld xmlns:a="http://schemas.openxmlformats.org/drawingml/2006/main" xmlns:p="http://schemas.openxmlformats.org/presentationml/2006/main" xmlns:r="http://schemas.openxmlformats.org/officeDocument/2006/relationships">
-  <p:cSld>
-    <p:spTree>
-      <p:nvGrpSpPr>
-        <p:cNvPr id="1" name=""/>
-        <p:cNvGrpSpPr/>
-        <p:nvPr/>
-      </p:nvGrpSpPr>
-      <p:grpSpPr/>
-      <p:sp>
-        <p:nvSpPr>
-          <p:cNvPr id="2" name="Rectangle 1"/>
-          <p:cNvSpPr/>
-          <p:nvPr/>
-        </p:nvSpPr>
-        <p:spPr>
-          <a:xfrm>
-            <a:off x="0" y="0"/>
-            <a:ext cx="12188952" cy="960120"/>
-          </a:xfrm>
-          <a:prstGeom prst="rect">
-            <a:avLst/>
-          </a:prstGeom>
-          <a:solidFill>
-            <a:srgbClr val="1B2A4A"/>
-          </a:solidFill>
-          <a:ln/>
-        </p:spPr>
-        <p:style>
-          <a:lnRef idx="1">
-            <a:schemeClr val="accent1"/>
-          </a:lnRef>
-          <a:fillRef idx="3">
-            <a:schemeClr val="accent1"/>
-          </a:fillRef>
-          <a:effectRef idx="2">
-            <a:schemeClr val="accent1"/>
-          </a:effectRef>
-          <a:fontRef idx="minor">
-            <a:schemeClr val="lt1"/>
-          </a:fontRef>
-        </p:style>
-        <p:txBody>
-          <a:bodyPr rtlCol="0" anchor="ctr"/>
-          <a:lstStyle/>
-          <a:p>
-            <a:pPr algn="ctr"/>
-          </a:p>
-        </p:txBody>
-      </p:sp>
-      <p:sp>
-        <p:nvSpPr>
-          <p:cNvPr id="3" name="TextBox 2"/>
-          <p:cNvSpPr txBox="1"/>
-          <p:nvPr/>
-        </p:nvSpPr>
-        <p:spPr>
-          <a:xfrm>
-            <a:off x="320040" y="73152"/>
-            <a:ext cx="11247120" cy="502920"/>
-          </a:xfrm>
-          <a:prstGeom prst="rect">
-            <a:avLst/>
-          </a:prstGeom>
-          <a:noFill/>
-        </p:spPr>
-        <p:txBody>
-          <a:bodyPr wrap="square">
-            <a:spAutoFit/>
-          </a:bodyPr>
-          <a:lstStyle/>
-          <a:p>
-            <a:pPr algn="l"/>
-            <a:r>
-              <a:rPr sz="2600" b="1" i="0">
-                <a:solidFill>
-                  <a:srgbClr val="FFFFFF"/>
-                </a:solidFill>
-                <a:latin typeface="Calibri"/>
-              </a:rPr>
-              <a:t>A Urgência — O Que Está em Jogo</a:t>
-            </a:r>
-          </a:p>
-        </p:txBody>
-      </p:sp>
-      <p:sp>
-        <p:nvSpPr>
-          <p:cNvPr id="4" name="TextBox 3"/>
-          <p:cNvSpPr txBox="1"/>
-          <p:nvPr/>
-        </p:nvSpPr>
-        <p:spPr>
-          <a:xfrm>
-            <a:off x="320040" y="576072"/>
-            <a:ext cx="11247120" cy="320040"/>
-          </a:xfrm>
-          <a:prstGeom prst="rect">
-            <a:avLst/>
-          </a:prstGeom>
-          <a:noFill/>
-        </p:spPr>
-        <p:txBody>
-          <a:bodyPr wrap="square">
-            <a:spAutoFit/>
-          </a:bodyPr>
-          <a:lstStyle/>
-          <a:p>
-            <a:pPr algn="l"/>
-            <a:r>
-              <a:rPr sz="1300" b="0" i="0">
-                <a:solidFill>
-                  <a:srgbClr val="BBDEFB"/>
-                </a:solidFill>
-                <a:latin typeface="Calibri"/>
-              </a:rPr>
-              <a:t>Pleno emprego sem prosperidade: 94,4% empregados, renda real estagnada</a:t>
-            </a:r>
-          </a:p>
-        </p:txBody>
-      </p:sp>
-      <p:pic>
-        <p:nvPicPr>
-          <p:cNvPr id="5" name="Picture 4" descr="estado_h4_tendencia.png"/>
-          <p:cNvPicPr>
-            <a:picLocks noChangeAspect="1"/>
-          </p:cNvPicPr>
-          <p:nvPr/>
-        </p:nvPicPr>
-        <p:blipFill>
-          <a:blip r:embed="rId2"/>
-          <a:stretch>
-            <a:fillRect/>
-          </a:stretch>
-        </p:blipFill>
-        <p:spPr>
-          <a:xfrm>
-            <a:off x="274320" y="1097280"/>
-            <a:ext cx="5669280" cy="2387374"/>
-          </a:xfrm>
-          <a:prstGeom prst="rect">
-            <a:avLst/>
-          </a:prstGeom>
-        </p:spPr>
-      </p:pic>
-      <p:pic>
-        <p:nvPicPr>
-          <p:cNvPr id="6" name="Picture 5" descr="estado_h5_armadilha.png"/>
-          <p:cNvPicPr>
-            <a:picLocks noChangeAspect="1"/>
-          </p:cNvPicPr>
-          <p:nvPr/>
-        </p:nvPicPr>
-        <p:blipFill>
-          <a:blip r:embed="rId3"/>
-          <a:stretch>
-            <a:fillRect/>
-          </a:stretch>
-        </p:blipFill>
-        <p:spPr>
-          <a:xfrm>
-            <a:off x="6126480" y="1097280"/>
-            <a:ext cx="5760720" cy="2423207"/>
-          </a:xfrm>
-          <a:prstGeom prst="rect">
-            <a:avLst/>
-          </a:prstGeom>
-        </p:spPr>
-      </p:pic>
-      <p:sp>
-        <p:nvSpPr>
-          <p:cNvPr id="7" name="Rectangle 6"/>
-          <p:cNvSpPr/>
-          <p:nvPr/>
-        </p:nvSpPr>
-        <p:spPr>
-          <a:xfrm>
-            <a:off x="274320" y="4754880"/>
-            <a:ext cx="2743200" cy="1234440"/>
-          </a:xfrm>
-          <a:prstGeom prst="rect">
-            <a:avLst/>
-          </a:prstGeom>
-          <a:solidFill>
-            <a:srgbClr val="E8F5E9"/>
-          </a:solidFill>
-          <a:ln w="19050">
-            <a:solidFill>
-              <a:srgbClr val="2E7D32"/>
-            </a:solidFill>
-          </a:ln>
-        </p:spPr>
-        <p:style>
-          <a:lnRef idx="1">
-            <a:schemeClr val="accent1"/>
-          </a:lnRef>
-          <a:fillRef idx="3">
-            <a:schemeClr val="accent1"/>
-          </a:fillRef>
-          <a:effectRef idx="2">
-            <a:schemeClr val="accent1"/>
-          </a:effectRef>
-          <a:fontRef idx="minor">
-            <a:schemeClr val="lt1"/>
-          </a:fontRef>
-        </p:style>
-        <p:txBody>
-          <a:bodyPr rtlCol="0" anchor="ctr"/>
-          <a:lstStyle/>
-          <a:p>
-            <a:pPr algn="ctr"/>
-          </a:p>
-        </p:txBody>
-      </p:sp>
-      <p:sp>
-        <p:nvSpPr>
-          <p:cNvPr id="8" name="TextBox 7"/>
-          <p:cNvSpPr txBox="1"/>
-          <p:nvPr/>
-        </p:nvSpPr>
-        <p:spPr>
-          <a:xfrm>
-            <a:off x="365760" y="4828032"/>
-            <a:ext cx="2560320" cy="658368"/>
-          </a:xfrm>
-          <a:prstGeom prst="rect">
-            <a:avLst/>
-          </a:prstGeom>
-          <a:noFill/>
-        </p:spPr>
-        <p:txBody>
-          <a:bodyPr wrap="square">
-            <a:spAutoFit/>
-          </a:bodyPr>
-          <a:lstStyle/>
-          <a:p>
-            <a:pPr algn="ctr"/>
-            <a:r>
-              <a:rPr sz="3400" b="1" i="0">
-                <a:solidFill>
-                  <a:srgbClr val="2E7D32"/>
-                </a:solidFill>
-                <a:latin typeface="Calibri"/>
-              </a:rPr>
-              <a:t>94,4%</a:t>
-            </a:r>
-          </a:p>
-        </p:txBody>
-      </p:sp>
-      <p:sp>
-        <p:nvSpPr>
-          <p:cNvPr id="9" name="TextBox 8"/>
-          <p:cNvSpPr txBox="1"/>
-          <p:nvPr/>
-        </p:nvSpPr>
-        <p:spPr>
-          <a:xfrm>
-            <a:off x="365760" y="5468112"/>
-            <a:ext cx="2560320" cy="320040"/>
-          </a:xfrm>
-          <a:prstGeom prst="rect">
-            <a:avLst/>
-          </a:prstGeom>
-          <a:noFill/>
-        </p:spPr>
-        <p:txBody>
-          <a:bodyPr wrap="square">
-            <a:spAutoFit/>
-          </a:bodyPr>
-          <a:lstStyle/>
-          <a:p>
-            <a:pPr algn="ctr"/>
-            <a:r>
-              <a:rPr sz="1150" b="1" i="0">
-                <a:solidFill>
-                  <a:srgbClr val="212121"/>
-                </a:solidFill>
-                <a:latin typeface="Calibri"/>
-              </a:rPr>
-              <a:t>emprego em 2025</a:t>
-            </a:r>
-          </a:p>
-        </p:txBody>
-      </p:sp>
-      <p:sp>
-        <p:nvSpPr>
-          <p:cNvPr id="10" name="TextBox 9"/>
-          <p:cNvSpPr txBox="1"/>
-          <p:nvPr/>
-        </p:nvSpPr>
-        <p:spPr>
-          <a:xfrm>
-            <a:off x="365760" y="5779008"/>
-            <a:ext cx="2560320" cy="292608"/>
-          </a:xfrm>
-          <a:prstGeom prst="rect">
-            <a:avLst/>
-          </a:prstGeom>
-          <a:noFill/>
-        </p:spPr>
-        <p:txBody>
-          <a:bodyPr wrap="square">
-            <a:spAutoFit/>
-          </a:bodyPr>
-          <a:lstStyle/>
-          <a:p>
-            <a:pPr algn="ctr"/>
-            <a:r>
-              <a:rPr sz="950" b="0" i="1">
-                <a:solidFill>
-                  <a:srgbClr val="616161"/>
-                </a:solidFill>
-                <a:latin typeface="Calibri"/>
-              </a:rPr>
-              <a:t>máxima histórica da série</a:t>
-            </a:r>
-          </a:p>
-        </p:txBody>
-      </p:sp>
-      <p:sp>
-        <p:nvSpPr>
-          <p:cNvPr id="11" name="Rectangle 10"/>
-          <p:cNvSpPr/>
-          <p:nvPr/>
-        </p:nvSpPr>
-        <p:spPr>
-          <a:xfrm>
-            <a:off x="3200400" y="4754880"/>
-            <a:ext cx="2743200" cy="1234440"/>
-          </a:xfrm>
-          <a:prstGeom prst="rect">
-            <a:avLst/>
-          </a:prstGeom>
-          <a:solidFill>
-            <a:srgbClr val="FFEBEE"/>
-          </a:solidFill>
-          <a:ln w="19050">
-            <a:solidFill>
-              <a:srgbClr val="C62828"/>
-            </a:solidFill>
-          </a:ln>
-        </p:spPr>
-        <p:style>
-          <a:lnRef idx="1">
-            <a:schemeClr val="accent1"/>
-          </a:lnRef>
-          <a:fillRef idx="3">
-            <a:schemeClr val="accent1"/>
-          </a:fillRef>
-          <a:effectRef idx="2">
-            <a:schemeClr val="accent1"/>
-          </a:effectRef>
-          <a:fontRef idx="minor">
-            <a:schemeClr val="lt1"/>
-          </a:fontRef>
-        </p:style>
-        <p:txBody>
-          <a:bodyPr rtlCol="0" anchor="ctr"/>
-          <a:lstStyle/>
-          <a:p>
-            <a:pPr algn="ctr"/>
-          </a:p>
-        </p:txBody>
-      </p:sp>
-      <p:sp>
-        <p:nvSpPr>
-          <p:cNvPr id="12" name="TextBox 11"/>
-          <p:cNvSpPr txBox="1"/>
-          <p:nvPr/>
-        </p:nvSpPr>
-        <p:spPr>
-          <a:xfrm>
-            <a:off x="3291840" y="4828032"/>
-            <a:ext cx="2560320" cy="658368"/>
-          </a:xfrm>
-          <a:prstGeom prst="rect">
-            <a:avLst/>
-          </a:prstGeom>
-          <a:noFill/>
-        </p:spPr>
-        <p:txBody>
-          <a:bodyPr wrap="square">
-            <a:spAutoFit/>
-          </a:bodyPr>
-          <a:lstStyle/>
-          <a:p>
-            <a:pPr algn="ctr"/>
-            <a:r>
-              <a:rPr sz="3400" b="1" i="0">
-                <a:solidFill>
-                  <a:srgbClr val="C62828"/>
-                </a:solidFill>
-                <a:latin typeface="Calibri"/>
-              </a:rPr>
-              <a:t>R$1.283</a:t>
-            </a:r>
-          </a:p>
-        </p:txBody>
-      </p:sp>
-      <p:sp>
-        <p:nvSpPr>
-          <p:cNvPr id="13" name="TextBox 12"/>
-          <p:cNvSpPr txBox="1"/>
-          <p:nvPr/>
-        </p:nvSpPr>
-        <p:spPr>
-          <a:xfrm>
-            <a:off x="3291840" y="5468112"/>
-            <a:ext cx="2560320" cy="320040"/>
-          </a:xfrm>
-          <a:prstGeom prst="rect">
-            <a:avLst/>
-          </a:prstGeom>
-          <a:noFill/>
-        </p:spPr>
-        <p:txBody>
-          <a:bodyPr wrap="square">
-            <a:spAutoFit/>
-          </a:bodyPr>
-          <a:lstStyle/>
-          <a:p>
-            <a:pPr algn="ctr"/>
-            <a:r>
-              <a:rPr sz="1150" b="1" i="0">
-                <a:solidFill>
-                  <a:srgbClr val="212121"/>
-                </a:solidFill>
-                <a:latin typeface="Calibri"/>
-              </a:rPr>
-              <a:t>renda real 2025</a:t>
-            </a:r>
-          </a:p>
-        </p:txBody>
-      </p:sp>
-      <p:sp>
-        <p:nvSpPr>
-          <p:cNvPr id="14" name="TextBox 13"/>
-          <p:cNvSpPr txBox="1"/>
-          <p:nvPr/>
-        </p:nvSpPr>
-        <p:spPr>
-          <a:xfrm>
-            <a:off x="3291840" y="5779008"/>
-            <a:ext cx="2560320" cy="292608"/>
-          </a:xfrm>
-          <a:prstGeom prst="rect">
-            <a:avLst/>
-          </a:prstGeom>
-          <a:noFill/>
-        </p:spPr>
-        <p:txBody>
-          <a:bodyPr wrap="square">
-            <a:spAutoFit/>
-          </a:bodyPr>
-          <a:lstStyle/>
-          <a:p>
-            <a:pPr algn="ctr"/>
-            <a:r>
-              <a:rPr sz="950" b="0" i="1">
-                <a:solidFill>
-                  <a:srgbClr val="616161"/>
-                </a:solidFill>
-                <a:latin typeface="Calibri"/>
-              </a:rPr>
-              <a:t>queda vs R$1.345 em 2024</a:t>
-            </a:r>
-          </a:p>
-        </p:txBody>
-      </p:sp>
-      <p:sp>
-        <p:nvSpPr>
-          <p:cNvPr id="15" name="Rectangle 14"/>
-          <p:cNvSpPr/>
-          <p:nvPr/>
-        </p:nvSpPr>
-        <p:spPr>
-          <a:xfrm>
-            <a:off x="6126480" y="4754880"/>
-            <a:ext cx="2743200" cy="1234440"/>
-          </a:xfrm>
-          <a:prstGeom prst="rect">
-            <a:avLst/>
-          </a:prstGeom>
-          <a:solidFill>
-            <a:srgbClr val="FFEBEE"/>
-          </a:solidFill>
-          <a:ln w="19050">
-            <a:solidFill>
-              <a:srgbClr val="C62828"/>
-            </a:solidFill>
-          </a:ln>
-        </p:spPr>
-        <p:style>
-          <a:lnRef idx="1">
-            <a:schemeClr val="accent1"/>
-          </a:lnRef>
-          <a:fillRef idx="3">
-            <a:schemeClr val="accent1"/>
-          </a:fillRef>
-          <a:effectRef idx="2">
-            <a:schemeClr val="accent1"/>
-          </a:effectRef>
-          <a:fontRef idx="minor">
-            <a:schemeClr val="lt1"/>
-          </a:fontRef>
-        </p:style>
-        <p:txBody>
-          <a:bodyPr rtlCol="0" anchor="ctr"/>
-          <a:lstStyle/>
-          <a:p>
-            <a:pPr algn="ctr"/>
-          </a:p>
-        </p:txBody>
-      </p:sp>
-      <p:sp>
-        <p:nvSpPr>
-          <p:cNvPr id="16" name="TextBox 15"/>
-          <p:cNvSpPr txBox="1"/>
-          <p:nvPr/>
-        </p:nvSpPr>
-        <p:spPr>
-          <a:xfrm>
-            <a:off x="6217920" y="4828032"/>
-            <a:ext cx="2560320" cy="658368"/>
-          </a:xfrm>
-          <a:prstGeom prst="rect">
-            <a:avLst/>
-          </a:prstGeom>
-          <a:noFill/>
-        </p:spPr>
-        <p:txBody>
-          <a:bodyPr wrap="square">
-            <a:spAutoFit/>
-          </a:bodyPr>
-          <a:lstStyle/>
-          <a:p>
-            <a:pPr algn="ctr"/>
-            <a:r>
-              <a:rPr sz="3400" b="1" i="0">
-                <a:solidFill>
-                  <a:srgbClr val="C62828"/>
-                </a:solidFill>
-                <a:latin typeface="Calibri"/>
-              </a:rPr>
-              <a:t>11%</a:t>
-            </a:r>
-          </a:p>
-        </p:txBody>
-      </p:sp>
-      <p:sp>
-        <p:nvSpPr>
-          <p:cNvPr id="17" name="TextBox 16"/>
-          <p:cNvSpPr txBox="1"/>
-          <p:nvPr/>
-        </p:nvSpPr>
-        <p:spPr>
-          <a:xfrm>
-            <a:off x="6217920" y="5468112"/>
-            <a:ext cx="2560320" cy="320040"/>
-          </a:xfrm>
-          <a:prstGeom prst="rect">
-            <a:avLst/>
-          </a:prstGeom>
-          <a:noFill/>
-        </p:spPr>
-        <p:txBody>
-          <a:bodyPr wrap="square">
-            <a:spAutoFit/>
-          </a:bodyPr>
-          <a:lstStyle/>
-          <a:p>
-            <a:pPr algn="ctr"/>
-            <a:r>
-              <a:rPr sz="1150" b="1" i="0">
-                <a:solidFill>
-                  <a:srgbClr val="212121"/>
-                </a:solidFill>
-                <a:latin typeface="Calibri"/>
-              </a:rPr>
-              <a:t>negros em alta
-qualificação</a:t>
-            </a:r>
-          </a:p>
-        </p:txBody>
-      </p:sp>
-      <p:sp>
-        <p:nvSpPr>
-          <p:cNvPr id="18" name="TextBox 17"/>
-          <p:cNvSpPr txBox="1"/>
-          <p:nvPr/>
-        </p:nvSpPr>
-        <p:spPr>
-          <a:xfrm>
-            <a:off x="6217920" y="5779008"/>
-            <a:ext cx="2560320" cy="292608"/>
-          </a:xfrm>
-          <a:prstGeom prst="rect">
-            <a:avLst/>
-          </a:prstGeom>
-          <a:noFill/>
-        </p:spPr>
-        <p:txBody>
-          <a:bodyPr wrap="square">
-            <a:spAutoFit/>
-          </a:bodyPr>
-          <a:lstStyle/>
-          <a:p>
-            <a:pPr algn="ctr"/>
-            <a:r>
-              <a:rPr sz="950" b="0" i="1">
-                <a:solidFill>
-                  <a:srgbClr val="616161"/>
-                </a:solidFill>
-                <a:latin typeface="Calibri"/>
-              </a:rPr>
-              <a:t>brancos: 22,4%</a:t>
-            </a:r>
-          </a:p>
-        </p:txBody>
-      </p:sp>
-      <p:sp>
-        <p:nvSpPr>
-          <p:cNvPr id="19" name="Rectangle 18"/>
-          <p:cNvSpPr/>
-          <p:nvPr/>
-        </p:nvSpPr>
-        <p:spPr>
-          <a:xfrm>
-            <a:off x="9052560" y="4754880"/>
-            <a:ext cx="2743200" cy="1234440"/>
-          </a:xfrm>
-          <a:prstGeom prst="rect">
-            <a:avLst/>
-          </a:prstGeom>
-          <a:solidFill>
-            <a:srgbClr val="FFF9E7"/>
-          </a:solidFill>
-          <a:ln w="19050">
-            <a:solidFill>
-              <a:srgbClr val="FF8F00"/>
-            </a:solidFill>
-          </a:ln>
-        </p:spPr>
-        <p:style>
-          <a:lnRef idx="1">
-            <a:schemeClr val="accent1"/>
-          </a:lnRef>
-          <a:fillRef idx="3">
-            <a:schemeClr val="accent1"/>
-          </a:fillRef>
-          <a:effectRef idx="2">
-            <a:schemeClr val="accent1"/>
-          </a:effectRef>
-          <a:fontRef idx="minor">
-            <a:schemeClr val="lt1"/>
-          </a:fontRef>
-        </p:style>
-        <p:txBody>
-          <a:bodyPr rtlCol="0" anchor="ctr"/>
-          <a:lstStyle/>
-          <a:p>
-            <a:pPr algn="ctr"/>
-          </a:p>
-        </p:txBody>
-      </p:sp>
-      <p:sp>
-        <p:nvSpPr>
-          <p:cNvPr id="20" name="TextBox 19"/>
-          <p:cNvSpPr txBox="1"/>
-          <p:nvPr/>
-        </p:nvSpPr>
-        <p:spPr>
-          <a:xfrm>
-            <a:off x="9144000" y="4828032"/>
-            <a:ext cx="2560320" cy="658368"/>
-          </a:xfrm>
-          <a:prstGeom prst="rect">
-            <a:avLst/>
-          </a:prstGeom>
-          <a:noFill/>
-        </p:spPr>
-        <p:txBody>
-          <a:bodyPr wrap="square">
-            <a:spAutoFit/>
-          </a:bodyPr>
-          <a:lstStyle/>
-          <a:p>
-            <a:pPr algn="ctr"/>
-            <a:r>
-              <a:rPr sz="3400" b="1" i="0">
-                <a:solidFill>
-                  <a:srgbClr val="FF8F00"/>
-                </a:solidFill>
-                <a:latin typeface="Calibri"/>
-              </a:rPr>
-              <a:t>+100</a:t>
-            </a:r>
-          </a:p>
-        </p:txBody>
-      </p:sp>
-      <p:sp>
-        <p:nvSpPr>
-          <p:cNvPr id="21" name="TextBox 20"/>
-          <p:cNvSpPr txBox="1"/>
-          <p:nvPr/>
-        </p:nvSpPr>
-        <p:spPr>
-          <a:xfrm>
-            <a:off x="9144000" y="5468112"/>
-            <a:ext cx="2560320" cy="320040"/>
-          </a:xfrm>
-          <a:prstGeom prst="rect">
-            <a:avLst/>
-          </a:prstGeom>
-          <a:noFill/>
-        </p:spPr>
-        <p:txBody>
-          <a:bodyPr wrap="square">
-            <a:spAutoFit/>
-          </a:bodyPr>
-          <a:lstStyle/>
-          <a:p>
-            <a:pPr algn="ctr"/>
-            <a:r>
-              <a:rPr sz="1150" b="1" i="0">
-                <a:solidFill>
-                  <a:srgbClr val="212121"/>
-                </a:solidFill>
-                <a:latin typeface="Calibri"/>
-              </a:rPr>
-              <a:t>anos para fechar
-o gap</a:t>
-            </a:r>
-          </a:p>
-        </p:txBody>
-      </p:sp>
-      <p:sp>
-        <p:nvSpPr>
-          <p:cNvPr id="22" name="TextBox 21"/>
-          <p:cNvSpPr txBox="1"/>
-          <p:nvPr/>
-        </p:nvSpPr>
-        <p:spPr>
-          <a:xfrm>
-            <a:off x="9144000" y="5779008"/>
-            <a:ext cx="2560320" cy="292608"/>
-          </a:xfrm>
-          <a:prstGeom prst="rect">
-            <a:avLst/>
-          </a:prstGeom>
-          <a:noFill/>
-        </p:spPr>
-        <p:txBody>
-          <a:bodyPr wrap="square">
-            <a:spAutoFit/>
-          </a:bodyPr>
-          <a:lstStyle/>
-          <a:p>
-            <a:pPr algn="ctr"/>
-            <a:r>
-              <a:rPr sz="950" b="0" i="1">
-                <a:solidFill>
-                  <a:srgbClr val="616161"/>
-                </a:solidFill>
-                <a:latin typeface="Calibri"/>
-              </a:rPr>
-              <a:t>no ritmo atual</a:t>
-            </a:r>
-          </a:p>
-        </p:txBody>
-      </p:sp>
-      <p:sp>
-        <p:nvSpPr>
-          <p:cNvPr id="23" name="Rectangle 22"/>
-          <p:cNvSpPr/>
-          <p:nvPr/>
-        </p:nvSpPr>
-        <p:spPr>
-          <a:xfrm>
-            <a:off x="274320" y="6309360"/>
-            <a:ext cx="11612880" cy="402336"/>
-          </a:xfrm>
-          <a:prstGeom prst="rect">
-            <a:avLst/>
-          </a:prstGeom>
-          <a:solidFill>
-            <a:srgbClr val="FFF9E7"/>
-          </a:solidFill>
-          <a:ln w="15240">
-            <a:solidFill>
-              <a:srgbClr val="FF8F00"/>
-            </a:solidFill>
-          </a:ln>
-        </p:spPr>
-        <p:style>
-          <a:lnRef idx="1">
-            <a:schemeClr val="accent1"/>
-          </a:lnRef>
-          <a:fillRef idx="3">
-            <a:schemeClr val="accent1"/>
-          </a:fillRef>
-          <a:effectRef idx="2">
-            <a:schemeClr val="accent1"/>
-          </a:effectRef>
-          <a:fontRef idx="minor">
-            <a:schemeClr val="lt1"/>
-          </a:fontRef>
-        </p:style>
-        <p:txBody>
-          <a:bodyPr rtlCol="0" anchor="ctr"/>
-          <a:lstStyle/>
-          <a:p>
-            <a:pPr algn="ctr"/>
-          </a:p>
-        </p:txBody>
-      </p:sp>
-      <p:sp>
-        <p:nvSpPr>
-          <p:cNvPr id="24" name="TextBox 23"/>
-          <p:cNvSpPr txBox="1"/>
-          <p:nvPr/>
-        </p:nvSpPr>
-        <p:spPr>
-          <a:xfrm>
-            <a:off x="411480" y="6400800"/>
-            <a:ext cx="11338560" cy="219456"/>
-          </a:xfrm>
-          <a:prstGeom prst="rect">
-            <a:avLst/>
-          </a:prstGeom>
-          <a:noFill/>
-        </p:spPr>
-        <p:txBody>
-          <a:bodyPr wrap="square">
-            <a:spAutoFit/>
-          </a:bodyPr>
-          <a:lstStyle/>
-          <a:p>
-            <a:pPr algn="ctr"/>
-            <a:r>
-              <a:rPr sz="1300" b="1" i="0">
-                <a:solidFill>
-                  <a:srgbClr val="1B2A4A"/>
-                </a:solidFill>
-                <a:latin typeface="Calibri"/>
-              </a:rPr>
-              <a:t>O Brasil está a produzir emprego, mas não prosperidade igualitária. Pleno emprego com segregação ocupacional é o cenário atual — e não se resolve sozinho.</a:t>
-            </a:r>
-          </a:p>
-        </p:txBody>
-      </p:sp>
-      <p:sp>
-        <p:nvSpPr>
-          <p:cNvPr id="25" name="Rectangle 24"/>
-          <p:cNvSpPr/>
-          <p:nvPr/>
-        </p:nvSpPr>
-        <p:spPr>
-          <a:xfrm>
-            <a:off x="0" y="6629400"/>
-            <a:ext cx="12188952" cy="228600"/>
-          </a:xfrm>
-          <a:prstGeom prst="rect">
-            <a:avLst/>
-          </a:prstGeom>
-          <a:solidFill>
-            <a:srgbClr val="1B2A4A"/>
-          </a:solidFill>
-          <a:ln/>
-        </p:spPr>
-        <p:style>
-          <a:lnRef idx="1">
-            <a:schemeClr val="accent1"/>
-          </a:lnRef>
-          <a:fillRef idx="3">
-            <a:schemeClr val="accent1"/>
-          </a:fillRef>
-          <a:effectRef idx="2">
-            <a:schemeClr val="accent1"/>
-          </a:effectRef>
-          <a:fontRef idx="minor">
-            <a:schemeClr val="lt1"/>
-          </a:fontRef>
-        </p:style>
-        <p:txBody>
-          <a:bodyPr rtlCol="0" anchor="ctr"/>
-          <a:lstStyle/>
-          <a:p>
-            <a:pPr algn="ctr"/>
-          </a:p>
-        </p:txBody>
-      </p:sp>
-      <p:sp>
-        <p:nvSpPr>
-          <p:cNvPr id="26" name="TextBox 25"/>
-          <p:cNvSpPr txBox="1"/>
-          <p:nvPr/>
-        </p:nvSpPr>
-        <p:spPr>
-          <a:xfrm>
-            <a:off x="182880" y="6647688"/>
-            <a:ext cx="10515600" cy="201168"/>
-          </a:xfrm>
-          <a:prstGeom prst="rect">
-            <a:avLst/>
-          </a:prstGeom>
-          <a:noFill/>
-        </p:spPr>
-        <p:txBody>
-          <a:bodyPr wrap="square">
-            <a:spAutoFit/>
-          </a:bodyPr>
-          <a:lstStyle/>
-          <a:p>
-            <a:pPr algn="l"/>
-            <a:r>
-              <a:rPr sz="750" b="0" i="0">
-                <a:solidFill>
-                  <a:srgbClr val="BBDEFB"/>
-                </a:solidFill>
-                <a:latin typeface="Calibri"/>
-              </a:rPr>
-              <a:t>PNAD Contínua 2016–2025  |  15,9 milhões de observações  |  Ricardo Calheiros — MBA USP/ESALQ</a:t>
-            </a:r>
-          </a:p>
-        </p:txBody>
-      </p:sp>
-      <p:sp>
-        <p:nvSpPr>
-          <p:cNvPr id="27" name="TextBox 26"/>
-          <p:cNvSpPr txBox="1"/>
-          <p:nvPr/>
-        </p:nvSpPr>
-        <p:spPr>
-          <a:xfrm>
-            <a:off x="11704320" y="6647688"/>
-            <a:ext cx="457200" cy="201168"/>
-          </a:xfrm>
-          <a:prstGeom prst="rect">
-            <a:avLst/>
-          </a:prstGeom>
-          <a:noFill/>
-        </p:spPr>
-        <p:txBody>
-          <a:bodyPr wrap="square">
-            <a:spAutoFit/>
-          </a:bodyPr>
-          <a:lstStyle/>
-          <a:p>
-            <a:pPr algn="r"/>
-            <a:r>
-              <a:rPr sz="750" b="0" i="0">
-                <a:solidFill>
-                  <a:srgbClr val="FFFFFF"/>
-                </a:solidFill>
-                <a:latin typeface="Calibri"/>
-              </a:rPr>
-              <a:t>13/14</a:t>
-            </a:r>
-          </a:p>
-        </p:txBody>
-      </p:sp>
-    </p:spTree>
-  </p:cSld>
-  <p:clrMapOvr>
-    <a:masterClrMapping/>
-  </p:clrMapOvr>
-</p:sld>
-</file>
-
-<file path=ppt/slides/slide14.xml><?xml version="1.0" encoding="utf-8"?>
-<p:sld xmlns:a="http://schemas.openxmlformats.org/drawingml/2006/main" xmlns:p="http://schemas.openxmlformats.org/presentationml/2006/main" xmlns:r="http://schemas.openxmlformats.org/officeDocument/2006/relationships">
-  <p:cSld>
-    <p:spTree>
-      <p:nvGrpSpPr>
-        <p:cNvPr id="1" name=""/>
-        <p:cNvGrpSpPr/>
-        <p:nvPr/>
-      </p:nvGrpSpPr>
-      <p:grpSpPr/>
-      <p:sp>
-        <p:nvSpPr>
-          <p:cNvPr id="2" name="Rectangle 1"/>
-          <p:cNvSpPr/>
-          <p:nvPr/>
-        </p:nvSpPr>
-        <p:spPr>
-          <a:xfrm>
-            <a:off x="0" y="0"/>
             <a:ext cx="12188952" cy="6858000"/>
           </a:xfrm>
           <a:prstGeom prst="rect">
@@ -9613,7 +6672,7 @@
                 </a:solidFill>
                 <a:latin typeface="Calibri"/>
               </a:rPr>
-              <a:t>Onde Você Mora Determina Sua Renda</a:t>
+              <a:t>Onde Você Mora Pesa na Sua Renda</a:t>
             </a:r>
           </a:p>
         </p:txBody>
@@ -9648,7 +6707,7 @@
                 </a:solidFill>
                 <a:latin typeface="Calibri"/>
               </a:rPr>
-              <a:t>A segregação residencial se converte diretamente em segregação de renda</a:t>
+              <a:t>A segregação residencial é um canal relevante da segregação de renda</a:t>
             </a:r>
           </a:p>
         </p:txBody>
@@ -9867,7 +6926,7 @@
                 </a:solidFill>
                 <a:latin typeface="Calibri"/>
               </a:rPr>
-              <a:t>▸  A renda média do bairro (UPA) é o MAIOR determinante individual de renda — mais do que a educação.</a:t>
+              <a:t>▸  O contexto do bairro (UPA) media mais da metade do gap salarial — a segregação residencial pesa tanto quanto a escolaridade. (mediação, não determinante causal isolado)</a:t>
             </a:r>
           </a:p>
         </p:txBody>
@@ -10107,7 +7166,7 @@
                 </a:solidFill>
                 <a:latin typeface="Calibri"/>
               </a:rPr>
-              <a:t>Em linguagem simples: se você mudar um negro do bairro mais pobre para o mais rico, você explica mais da metade do gap salarial — sem mudar nenhuma característica individual.</a:t>
+              <a:t>Em linguagem simples: o contexto do bairro (UPA) media mais da metade do gap salarial — ou seja, boa parte da diferença está associada ao território, não a características individuais.</a:t>
             </a:r>
           </a:p>
         </p:txBody>
@@ -13375,7 +10434,7 @@
                 </a:solidFill>
                 <a:latin typeface="Calibri"/>
               </a:rPr>
-              <a:t>A Rede que Exclui — Capital Social e Mobilidade</a:t>
+              <a:t>O Custo para Todos Nós — Inclusão Produtiva como Oportunidade</a:t>
             </a:r>
           </a:p>
         </p:txBody>
@@ -13410,14 +10469,14 @@
                 </a:solidFill>
                 <a:latin typeface="Calibri"/>
               </a:rPr>
-              <a:t>Negros ficam fora das redes que convertem diplomas em empregos</a:t>
+              <a:t>Hsieh et al. (2019): discriminação racial e de gênero custou ao EUA 20–40% do crescimento 1960–2010</a:t>
             </a:r>
           </a:p>
         </p:txBody>
       </p:sp>
       <p:pic>
         <p:nvPicPr>
-          <p:cNvPr id="5" name="Picture 4" descr="sna_rede_demografica.png"/>
+          <p:cNvPr id="5" name="Picture 4" descr="estado_h4_inclusao.png"/>
           <p:cNvPicPr>
             <a:picLocks noChangeAspect="1"/>
           </p:cNvPicPr>
@@ -13432,7 +10491,7 @@
         <p:spPr>
           <a:xfrm>
             <a:off x="274320" y="1097280"/>
-            <a:ext cx="5669280" cy="4240050"/>
+            <a:ext cx="5943600" cy="2497233"/>
           </a:xfrm>
           <a:prstGeom prst="rect">
             <a:avLst/>
@@ -13447,8 +10506,8 @@
         </p:nvSpPr>
         <p:spPr>
           <a:xfrm>
-            <a:off x="6309360" y="1097280"/>
-            <a:ext cx="5577840" cy="365760"/>
+            <a:off x="6675120" y="1097280"/>
+            <a:ext cx="5303520" cy="594360"/>
           </a:xfrm>
           <a:prstGeom prst="rect">
             <a:avLst/>
@@ -13469,7 +10528,8 @@
                 </a:solidFill>
                 <a:latin typeface="Calibri"/>
               </a:rPr>
-              <a:t>O que são as redes profissionais?</a:t>
+              <a:t>O que aconteceria se negros tivessem
+acesso igual às melhores vagas?</a:t>
             </a:r>
           </a:p>
         </p:txBody>
@@ -13482,8 +10542,8 @@
         </p:nvSpPr>
         <p:spPr>
           <a:xfrm>
-            <a:off x="6309360" y="1572768"/>
-            <a:ext cx="5577840" cy="777240"/>
+            <a:off x="6675120" y="1828800"/>
+            <a:ext cx="5303520" cy="1261872"/>
           </a:xfrm>
           <a:prstGeom prst="rect">
             <a:avLst/>
@@ -13491,9 +10551,9 @@
           <a:solidFill>
             <a:srgbClr val="F5F5F5"/>
           </a:solidFill>
-          <a:ln w="6350">
+          <a:ln w="25400">
             <a:solidFill>
-              <a:srgbClr val="616161"/>
+              <a:srgbClr val="C62828"/>
             </a:solidFill>
           </a:ln>
         </p:spPr>
@@ -13521,61 +10581,22 @@
       </p:sp>
       <p:sp>
         <p:nvSpPr>
-          <p:cNvPr id="8" name="TextBox 7"/>
-          <p:cNvSpPr txBox="1"/>
-          <p:nvPr/>
-        </p:nvSpPr>
-        <p:spPr>
-          <a:xfrm>
-            <a:off x="6446520" y="1618488"/>
-            <a:ext cx="5303520" cy="685800"/>
-          </a:xfrm>
-          <a:prstGeom prst="rect">
-            <a:avLst/>
-          </a:prstGeom>
-          <a:noFill/>
-        </p:spPr>
-        <p:txBody>
-          <a:bodyPr wrap="square">
-            <a:spAutoFit/>
-          </a:bodyPr>
-          <a:lstStyle/>
-          <a:p>
-            <a:pPr algn="l"/>
-            <a:r>
-              <a:rPr sz="1250" b="0" i="0">
-                <a:solidFill>
-                  <a:srgbClr val="1565C0"/>
-                </a:solidFill>
-                <a:latin typeface="Calibri"/>
-              </a:rPr>
-              <a:t>◆  Vagas nunca anunciadas são preenchidas por indicação — quem está na rede chega antes.</a:t>
-            </a:r>
-          </a:p>
-        </p:txBody>
-      </p:sp>
-      <p:sp>
-        <p:nvSpPr>
-          <p:cNvPr id="9" name="Rectangle 8"/>
+          <p:cNvPr id="8" name="Rectangle 7"/>
           <p:cNvSpPr/>
           <p:nvPr/>
         </p:nvSpPr>
         <p:spPr>
           <a:xfrm>
-            <a:off x="6309360" y="2441448"/>
-            <a:ext cx="5577840" cy="777240"/>
+            <a:off x="6675120" y="1828800"/>
+            <a:ext cx="5303520" cy="365760"/>
           </a:xfrm>
           <a:prstGeom prst="rect">
             <a:avLst/>
           </a:prstGeom>
           <a:solidFill>
-            <a:srgbClr val="F5F5F5"/>
+            <a:srgbClr val="C62828"/>
           </a:solidFill>
-          <a:ln w="6350">
-            <a:solidFill>
-              <a:srgbClr val="616161"/>
-            </a:solidFill>
-          </a:ln>
+          <a:ln/>
         </p:spPr>
         <p:style>
           <a:lnRef idx="1">
@@ -13601,14 +10622,49 @@
       </p:sp>
       <p:sp>
         <p:nvSpPr>
+          <p:cNvPr id="9" name="TextBox 8"/>
+          <p:cNvSpPr txBox="1"/>
+          <p:nvPr/>
+        </p:nvSpPr>
+        <p:spPr>
+          <a:xfrm>
+            <a:off x="6812280" y="1865376"/>
+            <a:ext cx="5029200" cy="347472"/>
+          </a:xfrm>
+          <a:prstGeom prst="rect">
+            <a:avLst/>
+          </a:prstGeom>
+          <a:noFill/>
+        </p:spPr>
+        <p:txBody>
+          <a:bodyPr wrap="square">
+            <a:spAutoFit/>
+          </a:bodyPr>
+          <a:lstStyle/>
+          <a:p>
+            <a:pPr algn="l"/>
+            <a:r>
+              <a:rPr sz="1400" b="1" i="0">
+                <a:solidFill>
+                  <a:srgbClr val="FFFFFF"/>
+                </a:solidFill>
+                <a:latin typeface="Calibri"/>
+              </a:rPr>
+              <a:t>Hoje</a:t>
+            </a:r>
+          </a:p>
+        </p:txBody>
+      </p:sp>
+      <p:sp>
+        <p:nvSpPr>
           <p:cNvPr id="10" name="TextBox 9"/>
           <p:cNvSpPr txBox="1"/>
           <p:nvPr/>
         </p:nvSpPr>
         <p:spPr>
           <a:xfrm>
-            <a:off x="6446520" y="2487168"/>
-            <a:ext cx="5303520" cy="685800"/>
+            <a:off x="6812280" y="2240280"/>
+            <a:ext cx="5029200" cy="347472"/>
           </a:xfrm>
           <a:prstGeom prst="rect">
             <a:avLst/>
@@ -13623,27 +10679,62 @@
           <a:p>
             <a:pPr algn="l"/>
             <a:r>
-              <a:rPr sz="1250" b="0" i="0">
-                <a:solidFill>
-                  <a:srgbClr val="1565C0"/>
-                </a:solidFill>
-                <a:latin typeface="Calibri"/>
-              </a:rPr>
-              <a:t>◆  Mentores, referências e "network" determinam promoção tão quanto o desempenho.</a:t>
-            </a:r>
-          </a:p>
-        </p:txBody>
-      </p:sp>
-      <p:sp>
-        <p:nvSpPr>
-          <p:cNvPr id="11" name="Rectangle 10"/>
+              <a:rPr sz="1200" b="1" i="0">
+                <a:solidFill>
+                  <a:srgbClr val="C62828"/>
+                </a:solidFill>
+                <a:latin typeface="Calibri"/>
+              </a:rPr>
+              <a:t>Mediana salarial: R$2.000 (brancos) vs R$1.450 (negros) — gap de 27,5%</a:t>
+            </a:r>
+          </a:p>
+        </p:txBody>
+      </p:sp>
+      <p:sp>
+        <p:nvSpPr>
+          <p:cNvPr id="11" name="TextBox 10"/>
+          <p:cNvSpPr txBox="1"/>
+          <p:nvPr/>
+        </p:nvSpPr>
+        <p:spPr>
+          <a:xfrm>
+            <a:off x="6812280" y="2578608"/>
+            <a:ext cx="5029200" cy="347472"/>
+          </a:xfrm>
+          <a:prstGeom prst="rect">
+            <a:avLst/>
+          </a:prstGeom>
+          <a:noFill/>
+        </p:spPr>
+        <p:txBody>
+          <a:bodyPr wrap="square">
+            <a:spAutoFit/>
+          </a:bodyPr>
+          <a:lstStyle/>
+          <a:p>
+            <a:pPr algn="l"/>
+            <a:r>
+              <a:rPr sz="1100" b="0" i="1">
+                <a:solidFill>
+                  <a:srgbClr val="616161"/>
+                </a:solidFill>
+                <a:latin typeface="Calibri"/>
+              </a:rPr>
+              <a:t>Gap médio de 37,5%; em cargos de alta qualificação: 11% negros vs 22% brancos</a:t>
+            </a:r>
+          </a:p>
+        </p:txBody>
+      </p:sp>
+      <p:sp>
+        <p:nvSpPr>
+          <p:cNvPr id="12" name="Rectangle 11"/>
           <p:cNvSpPr/>
           <p:nvPr/>
         </p:nvSpPr>
         <p:spPr>
           <a:xfrm>
-            <a:off x="6309360" y="3310128"/>
-            <a:ext cx="5577840" cy="777240"/>
+            <a:off x="6675120" y="3200400"/>
+            <a:ext cx="5303520" cy="1261872"/>
           </a:xfrm>
           <a:prstGeom prst="rect">
             <a:avLst/>
@@ -13651,9 +10742,9 @@
           <a:solidFill>
             <a:srgbClr val="F5F5F5"/>
           </a:solidFill>
-          <a:ln w="6350">
+          <a:ln w="25400">
             <a:solidFill>
-              <a:srgbClr val="616161"/>
+              <a:srgbClr val="2E7D32"/>
             </a:solidFill>
           </a:ln>
         </p:spPr>
@@ -13681,61 +10772,22 @@
       </p:sp>
       <p:sp>
         <p:nvSpPr>
-          <p:cNvPr id="12" name="TextBox 11"/>
-          <p:cNvSpPr txBox="1"/>
-          <p:nvPr/>
-        </p:nvSpPr>
-        <p:spPr>
-          <a:xfrm>
-            <a:off x="6446520" y="3355848"/>
-            <a:ext cx="5303520" cy="685800"/>
-          </a:xfrm>
-          <a:prstGeom prst="rect">
-            <a:avLst/>
-          </a:prstGeom>
-          <a:noFill/>
-        </p:spPr>
-        <p:txBody>
-          <a:bodyPr wrap="square">
-            <a:spAutoFit/>
-          </a:bodyPr>
-          <a:lstStyle/>
-          <a:p>
-            <a:pPr algn="l"/>
-            <a:r>
-              <a:rPr sz="1250" b="0" i="0">
-                <a:solidFill>
-                  <a:srgbClr val="212121"/>
-                </a:solidFill>
-                <a:latin typeface="Calibri"/>
-              </a:rPr>
-              <a:t>▸  A análise mostra: brancos atuam como conectores (brokers) em TODOS os níveis educacionais.</a:t>
-            </a:r>
-          </a:p>
-        </p:txBody>
-      </p:sp>
-      <p:sp>
-        <p:nvSpPr>
           <p:cNvPr id="13" name="Rectangle 12"/>
           <p:cNvSpPr/>
           <p:nvPr/>
         </p:nvSpPr>
         <p:spPr>
           <a:xfrm>
-            <a:off x="6309360" y="4178808"/>
-            <a:ext cx="5577840" cy="777240"/>
+            <a:off x="6675120" y="3200400"/>
+            <a:ext cx="5303520" cy="365760"/>
           </a:xfrm>
           <a:prstGeom prst="rect">
             <a:avLst/>
           </a:prstGeom>
           <a:solidFill>
-            <a:srgbClr val="FFEBEE"/>
+            <a:srgbClr val="2E7D32"/>
           </a:solidFill>
-          <a:ln w="6350">
-            <a:solidFill>
-              <a:srgbClr val="C62828"/>
-            </a:solidFill>
-          </a:ln>
+          <a:ln/>
         </p:spPr>
         <p:style>
           <a:lnRef idx="1">
@@ -13767,8 +10819,8 @@
         </p:nvSpPr>
         <p:spPr>
           <a:xfrm>
-            <a:off x="6446520" y="4224528"/>
-            <a:ext cx="5303520" cy="685800"/>
+            <a:off x="6812280" y="3236976"/>
+            <a:ext cx="5029200" cy="347472"/>
           </a:xfrm>
           <a:prstGeom prst="rect">
             <a:avLst/>
@@ -13783,27 +10835,97 @@
           <a:p>
             <a:pPr algn="l"/>
             <a:r>
-              <a:rPr sz="1250" b="0" i="0">
-                <a:solidFill>
-                  <a:srgbClr val="C62828"/>
-                </a:solidFill>
-                <a:latin typeface="Calibri"/>
-              </a:rPr>
-              <a:t>✗  Negros ficam nas bordas da rede — mesmo com pós-graduação, sem acesso ao centro.</a:t>
-            </a:r>
-          </a:p>
-        </p:txBody>
-      </p:sp>
-      <p:sp>
-        <p:nvSpPr>
-          <p:cNvPr id="15" name="Rectangle 14"/>
+              <a:rPr sz="1400" b="1" i="0">
+                <a:solidFill>
+                  <a:srgbClr val="FFFFFF"/>
+                </a:solidFill>
+                <a:latin typeface="Calibri"/>
+              </a:rPr>
+              <a:t>+127% renda</a:t>
+            </a:r>
+          </a:p>
+        </p:txBody>
+      </p:sp>
+      <p:sp>
+        <p:nvSpPr>
+          <p:cNvPr id="15" name="TextBox 14"/>
+          <p:cNvSpPr txBox="1"/>
+          <p:nvPr/>
+        </p:nvSpPr>
+        <p:spPr>
+          <a:xfrm>
+            <a:off x="6812280" y="3611880"/>
+            <a:ext cx="5029200" cy="347472"/>
+          </a:xfrm>
+          <a:prstGeom prst="rect">
+            <a:avLst/>
+          </a:prstGeom>
+          <a:noFill/>
+        </p:spPr>
+        <p:txBody>
+          <a:bodyPr wrap="square">
+            <a:spAutoFit/>
+          </a:bodyPr>
+          <a:lstStyle/>
+          <a:p>
+            <a:pPr algn="l"/>
+            <a:r>
+              <a:rPr sz="1200" b="1" i="0">
+                <a:solidFill>
+                  <a:srgbClr val="2E7D32"/>
+                </a:solidFill>
+                <a:latin typeface="Calibri"/>
+              </a:rPr>
+              <a:t>Se negros tivessem a mesma distribuição ocupacional que brancos</a:t>
+            </a:r>
+          </a:p>
+        </p:txBody>
+      </p:sp>
+      <p:sp>
+        <p:nvSpPr>
+          <p:cNvPr id="16" name="TextBox 15"/>
+          <p:cNvSpPr txBox="1"/>
+          <p:nvPr/>
+        </p:nvSpPr>
+        <p:spPr>
+          <a:xfrm>
+            <a:off x="6812280" y="3950208"/>
+            <a:ext cx="5029200" cy="347472"/>
+          </a:xfrm>
+          <a:prstGeom prst="rect">
+            <a:avLst/>
+          </a:prstGeom>
+          <a:noFill/>
+        </p:spPr>
+        <p:txBody>
+          <a:bodyPr wrap="square">
+            <a:spAutoFit/>
+          </a:bodyPr>
+          <a:lstStyle/>
+          <a:p>
+            <a:pPr algn="l"/>
+            <a:r>
+              <a:rPr sz="1100" b="0" i="1">
+                <a:solidFill>
+                  <a:srgbClr val="616161"/>
+                </a:solidFill>
+                <a:latin typeface="Calibri"/>
+              </a:rPr>
+              <a:t>A renda média dos trabalhadores negros mais que dobraria — sem nenhum aumento de produtividade</a:t>
+            </a:r>
+          </a:p>
+        </p:txBody>
+      </p:sp>
+      <p:sp>
+        <p:nvSpPr>
+          <p:cNvPr id="17" name="Rectangle 16"/>
           <p:cNvSpPr/>
           <p:nvPr/>
         </p:nvSpPr>
         <p:spPr>
           <a:xfrm>
-            <a:off x="6309360" y="5047488"/>
-            <a:ext cx="5577840" cy="777240"/>
+            <a:off x="6675120" y="4572000"/>
+            <a:ext cx="5303520" cy="1261872"/>
           </a:xfrm>
           <a:prstGeom prst="rect">
             <a:avLst/>
@@ -13811,9 +10933,9 @@
           <a:solidFill>
             <a:srgbClr val="F5F5F5"/>
           </a:solidFill>
-          <a:ln w="6350">
+          <a:ln w="25400">
             <a:solidFill>
-              <a:srgbClr val="616161"/>
+              <a:srgbClr val="00696D"/>
             </a:solidFill>
           </a:ln>
         </p:spPr>
@@ -13841,61 +10963,22 @@
       </p:sp>
       <p:sp>
         <p:nvSpPr>
-          <p:cNvPr id="16" name="TextBox 15"/>
-          <p:cNvSpPr txBox="1"/>
-          <p:nvPr/>
-        </p:nvSpPr>
-        <p:spPr>
-          <a:xfrm>
-            <a:off x="6446520" y="5093208"/>
-            <a:ext cx="5303520" cy="685800"/>
-          </a:xfrm>
-          <a:prstGeom prst="rect">
-            <a:avLst/>
-          </a:prstGeom>
-          <a:noFill/>
-        </p:spPr>
-        <p:txBody>
-          <a:bodyPr wrap="square">
-            <a:spAutoFit/>
-          </a:bodyPr>
-          <a:lstStyle/>
-          <a:p>
-            <a:pPr algn="l"/>
-            <a:r>
-              <a:rPr sz="1250" b="0" i="0">
-                <a:solidFill>
-                  <a:srgbClr val="212121"/>
-                </a:solidFill>
-                <a:latin typeface="Calibri"/>
-              </a:rPr>
-              <a:t>▸  Resultado: o diploma negro vale menos porque falta a rede que o converte em oportunidade.</a:t>
-            </a:r>
-          </a:p>
-        </p:txBody>
-      </p:sp>
-      <p:sp>
-        <p:nvSpPr>
-          <p:cNvPr id="17" name="Rectangle 16"/>
+          <p:cNvPr id="18" name="Rectangle 17"/>
           <p:cNvSpPr/>
           <p:nvPr/>
         </p:nvSpPr>
         <p:spPr>
           <a:xfrm>
-            <a:off x="274320" y="5989320"/>
-            <a:ext cx="5943600" cy="621792"/>
+            <a:off x="6675120" y="4572000"/>
+            <a:ext cx="5303520" cy="365760"/>
           </a:xfrm>
           <a:prstGeom prst="rect">
             <a:avLst/>
           </a:prstGeom>
           <a:solidFill>
-            <a:srgbClr val="E3F2FD"/>
+            <a:srgbClr val="00696D"/>
           </a:solidFill>
-          <a:ln w="15240">
-            <a:solidFill>
-              <a:srgbClr val="1565C0"/>
-            </a:solidFill>
-          </a:ln>
+          <a:ln/>
         </p:spPr>
         <p:style>
           <a:lnRef idx="1">
@@ -13921,42 +11004,112 @@
       </p:sp>
       <p:sp>
         <p:nvSpPr>
-          <p:cNvPr id="18" name="TextBox 17"/>
-          <p:cNvSpPr txBox="1"/>
-          <p:nvPr/>
-        </p:nvSpPr>
-        <p:spPr>
-          <a:xfrm>
-            <a:off x="411480" y="6080760"/>
-            <a:ext cx="5669280" cy="438912"/>
-          </a:xfrm>
-          <a:prstGeom prst="rect">
-            <a:avLst/>
-          </a:prstGeom>
-          <a:noFill/>
-        </p:spPr>
-        <p:txBody>
-          <a:bodyPr wrap="square">
-            <a:spAutoFit/>
-          </a:bodyPr>
-          <a:lstStyle/>
-          <a:p>
-            <a:pPr algn="ctr"/>
-            <a:r>
-              <a:rPr sz="1300" b="1" i="0">
-                <a:solidFill>
-                  <a:srgbClr val="1B2A4A"/>
-                </a:solidFill>
-                <a:latin typeface="Calibri"/>
-              </a:rPr>
-              <a:t>"Mesmo que dois candidatos tenham o mesmo currículo, o que tem a rede certa chega primeiro. Essa rede, historicamente, é majoritariamente branca."</a:t>
-            </a:r>
-          </a:p>
-        </p:txBody>
-      </p:sp>
-      <p:sp>
-        <p:nvSpPr>
-          <p:cNvPr id="19" name="Rectangle 18"/>
+          <p:cNvPr id="19" name="TextBox 18"/>
+          <p:cNvSpPr txBox="1"/>
+          <p:nvPr/>
+        </p:nvSpPr>
+        <p:spPr>
+          <a:xfrm>
+            <a:off x="6812280" y="4608576"/>
+            <a:ext cx="5029200" cy="347472"/>
+          </a:xfrm>
+          <a:prstGeom prst="rect">
+            <a:avLst/>
+          </a:prstGeom>
+          <a:noFill/>
+        </p:spPr>
+        <p:txBody>
+          <a:bodyPr wrap="square">
+            <a:spAutoFit/>
+          </a:bodyPr>
+          <a:lstStyle/>
+          <a:p>
+            <a:pPr algn="l"/>
+            <a:r>
+              <a:rPr sz="1400" b="1" i="0">
+                <a:solidFill>
+                  <a:srgbClr val="FFFFFF"/>
+                </a:solidFill>
+                <a:latin typeface="Calibri"/>
+              </a:rPr>
+              <a:t>Proxy: +74 p.p. PIB</a:t>
+            </a:r>
+          </a:p>
+        </p:txBody>
+      </p:sp>
+      <p:sp>
+        <p:nvSpPr>
+          <p:cNvPr id="20" name="TextBox 19"/>
+          <p:cNvSpPr txBox="1"/>
+          <p:nvPr/>
+        </p:nvSpPr>
+        <p:spPr>
+          <a:xfrm>
+            <a:off x="6812280" y="4983480"/>
+            <a:ext cx="5029200" cy="347472"/>
+          </a:xfrm>
+          <a:prstGeom prst="rect">
+            <a:avLst/>
+          </a:prstGeom>
+          <a:noFill/>
+        </p:spPr>
+        <p:txBody>
+          <a:bodyPr wrap="square">
+            <a:spAutoFit/>
+          </a:bodyPr>
+          <a:lstStyle/>
+          <a:p>
+            <a:pPr algn="l"/>
+            <a:r>
+              <a:rPr sz="1200" b="1" i="0">
+                <a:solidFill>
+                  <a:srgbClr val="00696D"/>
+                </a:solidFill>
+                <a:latin typeface="Calibri"/>
+              </a:rPr>
+              <a:t>Estimativa conservadora do impacto no crescimento</a:t>
+            </a:r>
+          </a:p>
+        </p:txBody>
+      </p:sp>
+      <p:sp>
+        <p:nvSpPr>
+          <p:cNvPr id="21" name="TextBox 20"/>
+          <p:cNvSpPr txBox="1"/>
+          <p:nvPr/>
+        </p:nvSpPr>
+        <p:spPr>
+          <a:xfrm>
+            <a:off x="6812280" y="5321808"/>
+            <a:ext cx="5029200" cy="347472"/>
+          </a:xfrm>
+          <a:prstGeom prst="rect">
+            <a:avLst/>
+          </a:prstGeom>
+          <a:noFill/>
+        </p:spPr>
+        <p:txBody>
+          <a:bodyPr wrap="square">
+            <a:spAutoFit/>
+          </a:bodyPr>
+          <a:lstStyle/>
+          <a:p>
+            <a:pPr algn="l"/>
+            <a:r>
+              <a:rPr sz="1100" b="0" i="1">
+                <a:solidFill>
+                  <a:srgbClr val="616161"/>
+                </a:solidFill>
+                <a:latin typeface="Calibri"/>
+              </a:rPr>
+              <a:t>Incluir negros nas melhores vagas seria um dos maiores motores de crescimento disponíveis hoje</a:t>
+            </a:r>
+          </a:p>
+        </p:txBody>
+      </p:sp>
+      <p:sp>
+        <p:nvSpPr>
+          <p:cNvPr id="22" name="Rectangle 21"/>
           <p:cNvSpPr/>
           <p:nvPr/>
         </p:nvSpPr>
@@ -13997,7 +11150,7 @@
       </p:sp>
       <p:sp>
         <p:nvSpPr>
-          <p:cNvPr id="20" name="TextBox 19"/>
+          <p:cNvPr id="23" name="TextBox 22"/>
           <p:cNvSpPr txBox="1"/>
           <p:nvPr/>
         </p:nvSpPr>
@@ -14032,7 +11185,7 @@
       </p:sp>
       <p:sp>
         <p:nvSpPr>
-          <p:cNvPr id="21" name="TextBox 20"/>
+          <p:cNvPr id="24" name="TextBox 23"/>
           <p:cNvSpPr txBox="1"/>
           <p:nvPr/>
         </p:nvSpPr>
@@ -14060,7 +11213,7 @@
                 </a:solidFill>
                 <a:latin typeface="Calibri"/>
               </a:rPr>
-              <a:t>8/14</a:t>
+              <a:t>10/14</a:t>
             </a:r>
           </a:p>
         </p:txBody>
@@ -14154,7 +11307,7 @@
                 </a:solidFill>
                 <a:latin typeface="Calibri"/>
               </a:rPr>
-              <a:t>O Estado Ajuda — Mas Não Resolve</a:t>
+              <a:t>O Que Funciona — Três Eixos de Ação</a:t>
             </a:r>
           </a:p>
         </p:txBody>
@@ -14189,79 +11342,31 @@
                 </a:solidFill>
                 <a:latin typeface="Calibri"/>
               </a:rPr>
-              <a:t>Setor público reduz a desigualdade geral, mas o gap racial persiste e o de gênero é MAIOR</a:t>
-            </a:r>
-          </a:p>
-        </p:txBody>
-      </p:sp>
-      <p:pic>
-        <p:nvPicPr>
-          <p:cNvPr id="5" name="Picture 4" descr="estado_h1_gini.png"/>
-          <p:cNvPicPr>
-            <a:picLocks noChangeAspect="1"/>
-          </p:cNvPicPr>
-          <p:nvPr/>
-        </p:nvPicPr>
-        <p:blipFill>
-          <a:blip r:embed="rId2"/>
-          <a:stretch>
-            <a:fillRect/>
-          </a:stretch>
-        </p:blipFill>
+              <a:t>Nenhum eixo isolado resolve. Os três precisam atuar simultaneamente.</a:t>
+            </a:r>
+          </a:p>
+        </p:txBody>
+      </p:sp>
+      <p:sp>
+        <p:nvSpPr>
+          <p:cNvPr id="5" name="Rectangle 4"/>
+          <p:cNvSpPr/>
+          <p:nvPr/>
+        </p:nvSpPr>
         <p:spPr>
           <a:xfrm>
             <a:off x="274320" y="1097280"/>
-            <a:ext cx="5486400" cy="2309167"/>
-          </a:xfrm>
-          <a:prstGeom prst="rect">
-            <a:avLst/>
-          </a:prstGeom>
-        </p:spPr>
-      </p:pic>
-      <p:pic>
-        <p:nvPicPr>
-          <p:cNvPr id="6" name="Picture 5" descr="estado_h2h3_gaps.png"/>
-          <p:cNvPicPr>
-            <a:picLocks noChangeAspect="1"/>
-          </p:cNvPicPr>
-          <p:nvPr/>
-        </p:nvPicPr>
-        <p:blipFill>
-          <a:blip r:embed="rId3"/>
-          <a:stretch>
-            <a:fillRect/>
-          </a:stretch>
-        </p:blipFill>
-        <p:spPr>
-          <a:xfrm>
-            <a:off x="6035040" y="1097280"/>
-            <a:ext cx="5852160" cy="2466138"/>
-          </a:xfrm>
-          <a:prstGeom prst="rect">
-            <a:avLst/>
-          </a:prstGeom>
-        </p:spPr>
-      </p:pic>
-      <p:sp>
-        <p:nvSpPr>
-          <p:cNvPr id="7" name="Rectangle 6"/>
-          <p:cNvSpPr/>
-          <p:nvPr/>
-        </p:nvSpPr>
-        <p:spPr>
-          <a:xfrm>
-            <a:off x="274320" y="4617720"/>
-            <a:ext cx="3566160" cy="1097280"/>
+            <a:ext cx="3749039" cy="5349240"/>
           </a:xfrm>
           <a:prstGeom prst="rect">
             <a:avLst/>
           </a:prstGeom>
           <a:solidFill>
-            <a:srgbClr val="E8F5E9"/>
+            <a:srgbClr val="F5F5F5"/>
           </a:solidFill>
-          <a:ln w="19050">
+          <a:ln w="25400">
             <a:solidFill>
-              <a:srgbClr val="2E7D32"/>
+              <a:srgbClr val="C62828"/>
             </a:solidFill>
           </a:ln>
         </p:spPr>
@@ -14289,131 +11394,22 @@
       </p:sp>
       <p:sp>
         <p:nvSpPr>
-          <p:cNvPr id="8" name="TextBox 7"/>
-          <p:cNvSpPr txBox="1"/>
-          <p:nvPr/>
-        </p:nvSpPr>
-        <p:spPr>
-          <a:xfrm>
-            <a:off x="411480" y="4645152"/>
-            <a:ext cx="1188720" cy="502920"/>
-          </a:xfrm>
-          <a:prstGeom prst="rect">
-            <a:avLst/>
-          </a:prstGeom>
-          <a:noFill/>
-        </p:spPr>
-        <p:txBody>
-          <a:bodyPr wrap="square">
-            <a:spAutoFit/>
-          </a:bodyPr>
-          <a:lstStyle/>
-          <a:p>
-            <a:pPr algn="l"/>
-            <a:r>
-              <a:rPr sz="2600" b="1" i="0">
-                <a:solidFill>
-                  <a:srgbClr val="2E7D32"/>
-                </a:solidFill>
-                <a:latin typeface="Calibri"/>
-              </a:rPr>
-              <a:t>Sim</a:t>
-            </a:r>
-          </a:p>
-        </p:txBody>
-      </p:sp>
-      <p:sp>
-        <p:nvSpPr>
-          <p:cNvPr id="9" name="TextBox 8"/>
-          <p:cNvSpPr txBox="1"/>
-          <p:nvPr/>
-        </p:nvSpPr>
-        <p:spPr>
-          <a:xfrm>
-            <a:off x="411480" y="5138928"/>
-            <a:ext cx="3291840" cy="320040"/>
-          </a:xfrm>
-          <a:prstGeom prst="rect">
-            <a:avLst/>
-          </a:prstGeom>
-          <a:noFill/>
-        </p:spPr>
-        <p:txBody>
-          <a:bodyPr wrap="square">
-            <a:spAutoFit/>
-          </a:bodyPr>
-          <a:lstStyle/>
-          <a:p>
-            <a:pPr algn="l"/>
-            <a:r>
-              <a:rPr sz="1200" b="1" i="0">
-                <a:solidFill>
-                  <a:srgbClr val="212121"/>
-                </a:solidFill>
-                <a:latin typeface="Calibri"/>
-              </a:rPr>
-              <a:t>Gini público &lt; privado</a:t>
-            </a:r>
-          </a:p>
-        </p:txBody>
-      </p:sp>
-      <p:sp>
-        <p:nvSpPr>
-          <p:cNvPr id="10" name="TextBox 9"/>
-          <p:cNvSpPr txBox="1"/>
-          <p:nvPr/>
-        </p:nvSpPr>
-        <p:spPr>
-          <a:xfrm>
-            <a:off x="411480" y="5458968"/>
-            <a:ext cx="3291840" cy="228600"/>
-          </a:xfrm>
-          <a:prstGeom prst="rect">
-            <a:avLst/>
-          </a:prstGeom>
-          <a:noFill/>
-        </p:spPr>
-        <p:txBody>
-          <a:bodyPr wrap="square">
-            <a:spAutoFit/>
-          </a:bodyPr>
-          <a:lstStyle/>
-          <a:p>
-            <a:pPr algn="l"/>
-            <a:r>
-              <a:rPr sz="1000" b="0" i="1">
-                <a:solidFill>
-                  <a:srgbClr val="616161"/>
-                </a:solidFill>
-                <a:latin typeface="Calibri"/>
-              </a:rPr>
-              <a:t>0,466 vs 0,472 — melhora marginal</a:t>
-            </a:r>
-          </a:p>
-        </p:txBody>
-      </p:sp>
-      <p:sp>
-        <p:nvSpPr>
-          <p:cNvPr id="11" name="Rectangle 10"/>
+          <p:cNvPr id="6" name="Rectangle 5"/>
           <p:cNvSpPr/>
           <p:nvPr/>
         </p:nvSpPr>
         <p:spPr>
           <a:xfrm>
-            <a:off x="4069080" y="4617720"/>
-            <a:ext cx="3566160" cy="1097280"/>
+            <a:off x="274320" y="1097280"/>
+            <a:ext cx="3749039" cy="502920"/>
           </a:xfrm>
           <a:prstGeom prst="rect">
             <a:avLst/>
           </a:prstGeom>
           <a:solidFill>
-            <a:srgbClr val="FFF9E7"/>
+            <a:srgbClr val="C62828"/>
           </a:solidFill>
-          <a:ln w="19050">
-            <a:solidFill>
-              <a:srgbClr val="FF8F00"/>
-            </a:solidFill>
-          </a:ln>
+          <a:ln/>
         </p:spPr>
         <p:style>
           <a:lnRef idx="1">
@@ -14439,14 +11435,14 @@
       </p:sp>
       <p:sp>
         <p:nvSpPr>
-          <p:cNvPr id="12" name="TextBox 11"/>
-          <p:cNvSpPr txBox="1"/>
-          <p:nvPr/>
-        </p:nvSpPr>
-        <p:spPr>
-          <a:xfrm>
-            <a:off x="4206240" y="4645152"/>
-            <a:ext cx="1188720" cy="502920"/>
+          <p:cNvPr id="7" name="TextBox 6"/>
+          <p:cNvSpPr txBox="1"/>
+          <p:nvPr/>
+        </p:nvSpPr>
+        <p:spPr>
+          <a:xfrm>
+            <a:off x="384048" y="1124712"/>
+            <a:ext cx="3529584" cy="457200"/>
           </a:xfrm>
           <a:prstGeom prst="rect">
             <a:avLst/>
@@ -14461,27 +11457,27 @@
           <a:p>
             <a:pPr algn="l"/>
             <a:r>
-              <a:rPr sz="2600" b="1" i="0">
-                <a:solidFill>
-                  <a:srgbClr val="FF8F00"/>
-                </a:solidFill>
-                <a:latin typeface="Calibri"/>
-              </a:rPr>
-              <a:t>Não</a:t>
-            </a:r>
-          </a:p>
-        </p:txBody>
-      </p:sp>
-      <p:sp>
-        <p:nvSpPr>
-          <p:cNvPr id="13" name="TextBox 12"/>
-          <p:cNvSpPr txBox="1"/>
-          <p:nvPr/>
-        </p:nvSpPr>
-        <p:spPr>
-          <a:xfrm>
-            <a:off x="4206240" y="5138928"/>
-            <a:ext cx="3291840" cy="320040"/>
+              <a:rPr sz="1500" b="1" i="0">
+                <a:solidFill>
+                  <a:srgbClr val="FFFFFF"/>
+                </a:solidFill>
+                <a:latin typeface="Calibri"/>
+              </a:rPr>
+              <a:t>Abrir as Portas</a:t>
+            </a:r>
+          </a:p>
+        </p:txBody>
+      </p:sp>
+      <p:sp>
+        <p:nvSpPr>
+          <p:cNvPr id="8" name="TextBox 7"/>
+          <p:cNvSpPr txBox="1"/>
+          <p:nvPr/>
+        </p:nvSpPr>
+        <p:spPr>
+          <a:xfrm>
+            <a:off x="457200" y="1691640"/>
+            <a:ext cx="3383280" cy="1097280"/>
           </a:xfrm>
           <a:prstGeom prst="rect">
             <a:avLst/>
@@ -14496,74 +11492,37 @@
           <a:p>
             <a:pPr algn="l"/>
             <a:r>
-              <a:rPr sz="1200" b="1" i="0">
+              <a:rPr sz="1200" b="0" i="0">
                 <a:solidFill>
                   <a:srgbClr val="212121"/>
                 </a:solidFill>
                 <a:latin typeface="Calibri"/>
               </a:rPr>
-              <a:t>Gap racial não some no concurso</a:t>
-            </a:r>
-          </a:p>
-        </p:txBody>
-      </p:sp>
-      <p:sp>
-        <p:nvSpPr>
-          <p:cNvPr id="14" name="TextBox 13"/>
-          <p:cNvSpPr txBox="1"/>
-          <p:nvPr/>
-        </p:nvSpPr>
-        <p:spPr>
-          <a:xfrm>
-            <a:off x="4206240" y="5458968"/>
-            <a:ext cx="3291840" cy="228600"/>
-          </a:xfrm>
-          <a:prstGeom prst="rect">
-            <a:avLst/>
-          </a:prstGeom>
-          <a:noFill/>
-        </p:spPr>
-        <p:txBody>
-          <a:bodyPr wrap="square">
-            <a:spAutoFit/>
-          </a:bodyPr>
-          <a:lstStyle/>
-          <a:p>
-            <a:pPr algn="l"/>
-            <a:r>
-              <a:rPr sz="1000" b="0" i="1">
-                <a:solidFill>
-                  <a:srgbClr val="616161"/>
-                </a:solidFill>
-                <a:latin typeface="Calibri"/>
-              </a:rPr>
-              <a:t>−28,1% público vs −34,3% privado</a:t>
-            </a:r>
-          </a:p>
-        </p:txBody>
-      </p:sp>
-      <p:sp>
-        <p:nvSpPr>
-          <p:cNvPr id="15" name="Rectangle 14"/>
+              <a:t>Ação 1:
+Cotas de acesso a cargos
+qualificados (meta: IR ≥ 0,80)</a:t>
+            </a:r>
+          </a:p>
+        </p:txBody>
+      </p:sp>
+      <p:sp>
+        <p:nvSpPr>
+          <p:cNvPr id="9" name="Rectangle 8"/>
           <p:cNvSpPr/>
           <p:nvPr/>
         </p:nvSpPr>
         <p:spPr>
           <a:xfrm>
-            <a:off x="7863840" y="4617720"/>
-            <a:ext cx="3566160" cy="1097280"/>
+            <a:off x="457200" y="2834640"/>
+            <a:ext cx="3383280" cy="18288"/>
           </a:xfrm>
           <a:prstGeom prst="rect">
             <a:avLst/>
           </a:prstGeom>
           <a:solidFill>
-            <a:srgbClr val="FFEBEE"/>
+            <a:srgbClr val="C62828"/>
           </a:solidFill>
-          <a:ln w="19050">
-            <a:solidFill>
-              <a:srgbClr val="C62828"/>
-            </a:solidFill>
-          </a:ln>
+          <a:ln/>
         </p:spPr>
         <p:style>
           <a:lnRef idx="1">
@@ -14589,14 +11548,14 @@
       </p:sp>
       <p:sp>
         <p:nvSpPr>
-          <p:cNvPr id="16" name="TextBox 15"/>
-          <p:cNvSpPr txBox="1"/>
-          <p:nvPr/>
-        </p:nvSpPr>
-        <p:spPr>
-          <a:xfrm>
-            <a:off x="8001000" y="4645152"/>
-            <a:ext cx="1188720" cy="502920"/>
+          <p:cNvPr id="10" name="TextBox 9"/>
+          <p:cNvSpPr txBox="1"/>
+          <p:nvPr/>
+        </p:nvSpPr>
+        <p:spPr>
+          <a:xfrm>
+            <a:off x="457200" y="2926080"/>
+            <a:ext cx="3383280" cy="1097280"/>
           </a:xfrm>
           <a:prstGeom prst="rect">
             <a:avLst/>
@@ -14611,109 +11570,38 @@
           <a:p>
             <a:pPr algn="l"/>
             <a:r>
-              <a:rPr sz="2600" b="1" i="0">
-                <a:solidFill>
-                  <a:srgbClr val="C62828"/>
-                </a:solidFill>
-                <a:latin typeface="Calibri"/>
-              </a:rPr>
-              <a:t>Piora</a:t>
-            </a:r>
-          </a:p>
-        </p:txBody>
-      </p:sp>
-      <p:sp>
-        <p:nvSpPr>
-          <p:cNvPr id="17" name="TextBox 16"/>
-          <p:cNvSpPr txBox="1"/>
-          <p:nvPr/>
-        </p:nvSpPr>
-        <p:spPr>
-          <a:xfrm>
-            <a:off x="8001000" y="5138928"/>
-            <a:ext cx="3291840" cy="320040"/>
-          </a:xfrm>
-          <a:prstGeom prst="rect">
-            <a:avLst/>
-          </a:prstGeom>
-          <a:noFill/>
-        </p:spPr>
-        <p:txBody>
-          <a:bodyPr wrap="square">
-            <a:spAutoFit/>
-          </a:bodyPr>
-          <a:lstStyle/>
-          <a:p>
-            <a:pPr algn="l"/>
-            <a:r>
-              <a:rPr sz="1200" b="1" i="0">
+              <a:rPr sz="1200" b="0" i="0">
                 <a:solidFill>
                   <a:srgbClr val="212121"/>
                 </a:solidFill>
                 <a:latin typeface="Calibri"/>
               </a:rPr>
-              <a:t>Gap de gênero é maior no público</a:t>
-            </a:r>
-          </a:p>
-        </p:txBody>
-      </p:sp>
-      <p:sp>
-        <p:nvSpPr>
-          <p:cNvPr id="18" name="TextBox 17"/>
-          <p:cNvSpPr txBox="1"/>
-          <p:nvPr/>
-        </p:nvSpPr>
-        <p:spPr>
-          <a:xfrm>
-            <a:off x="8001000" y="5458968"/>
-            <a:ext cx="3291840" cy="228600"/>
-          </a:xfrm>
-          <a:prstGeom prst="rect">
-            <a:avLst/>
-          </a:prstGeom>
-          <a:noFill/>
-        </p:spPr>
-        <p:txBody>
-          <a:bodyPr wrap="square">
-            <a:spAutoFit/>
-          </a:bodyPr>
-          <a:lstStyle/>
-          <a:p>
-            <a:pPr algn="l"/>
-            <a:r>
-              <a:rPr sz="1000" b="0" i="1">
-                <a:solidFill>
-                  <a:srgbClr val="616161"/>
-                </a:solidFill>
-                <a:latin typeface="Calibri"/>
-              </a:rPr>
-              <a:t>−21,2% público vs −18,9% privado</a:t>
-            </a:r>
-          </a:p>
-        </p:txBody>
-      </p:sp>
-      <p:sp>
-        <p:nvSpPr>
-          <p:cNvPr id="19" name="Rectangle 18"/>
+              <a:t>Ação 2:
+Formação profissional com
+recorte racial e bolsas de
+residência em empresas premium</a:t>
+            </a:r>
+          </a:p>
+        </p:txBody>
+      </p:sp>
+      <p:sp>
+        <p:nvSpPr>
+          <p:cNvPr id="11" name="Rectangle 10"/>
           <p:cNvSpPr/>
           <p:nvPr/>
         </p:nvSpPr>
         <p:spPr>
           <a:xfrm>
-            <a:off x="274320" y="5788152"/>
-            <a:ext cx="11612880" cy="457200"/>
+            <a:off x="365760" y="4114800"/>
+            <a:ext cx="3566160" cy="18288"/>
           </a:xfrm>
           <a:prstGeom prst="rect">
             <a:avLst/>
           </a:prstGeom>
           <a:solidFill>
-            <a:srgbClr val="FFF9E7"/>
+            <a:srgbClr val="C62828"/>
           </a:solidFill>
-          <a:ln w="15240">
-            <a:solidFill>
-              <a:srgbClr val="FF8F00"/>
-            </a:solidFill>
-          </a:ln>
+          <a:ln/>
         </p:spPr>
         <p:style>
           <a:lnRef idx="1">
@@ -14739,49 +11627,14 @@
       </p:sp>
       <p:sp>
         <p:nvSpPr>
-          <p:cNvPr id="20" name="TextBox 19"/>
-          <p:cNvSpPr txBox="1"/>
-          <p:nvPr/>
-        </p:nvSpPr>
-        <p:spPr>
-          <a:xfrm>
-            <a:off x="411480" y="5879592"/>
-            <a:ext cx="11338560" cy="274320"/>
-          </a:xfrm>
-          <a:prstGeom prst="rect">
-            <a:avLst/>
-          </a:prstGeom>
-          <a:noFill/>
-        </p:spPr>
-        <p:txBody>
-          <a:bodyPr wrap="square">
-            <a:spAutoFit/>
-          </a:bodyPr>
-          <a:lstStyle/>
-          <a:p>
-            <a:pPr algn="ctr"/>
-            <a:r>
-              <a:rPr sz="1300" b="1" i="0">
-                <a:solidFill>
-                  <a:srgbClr val="1B2A4A"/>
-                </a:solidFill>
-                <a:latin typeface="Calibri"/>
-              </a:rPr>
-              <a:t>O concurso público equaliza a entrada, mas a promoção às posições de liderança (DAS, chefia) ainda reflete os vieses do setor privado — ou piores.</a:t>
-            </a:r>
-          </a:p>
-        </p:txBody>
-      </p:sp>
-      <p:sp>
-        <p:nvSpPr>
-          <p:cNvPr id="21" name="TextBox 20"/>
-          <p:cNvSpPr txBox="1"/>
-          <p:nvPr/>
-        </p:nvSpPr>
-        <p:spPr>
-          <a:xfrm>
-            <a:off x="320040" y="6327648"/>
-            <a:ext cx="11521440" cy="256032"/>
+          <p:cNvPr id="12" name="TextBox 11"/>
+          <p:cNvSpPr txBox="1"/>
+          <p:nvPr/>
+        </p:nvSpPr>
+        <p:spPr>
+          <a:xfrm>
+            <a:off x="411480" y="4206240"/>
+            <a:ext cx="3474720" cy="640080"/>
           </a:xfrm>
           <a:prstGeom prst="rect">
             <a:avLst/>
@@ -14796,35 +11649,40 @@
           <a:p>
             <a:pPr algn="l"/>
             <a:r>
-              <a:rPr sz="950" b="0" i="1">
-                <a:solidFill>
-                  <a:srgbClr val="616161"/>
-                </a:solidFill>
-                <a:latin typeface="Calibri"/>
-              </a:rPr>
-              <a:t>Contexto IBGE 2025: a qualidade de vida melhorou (POF), mas a desigualdade de renda voltou a subir (Gini per capita 0,491) — o avanço agregado não fecha o gap racial.</a:t>
-            </a:r>
-          </a:p>
-        </p:txBody>
-      </p:sp>
-      <p:sp>
-        <p:nvSpPr>
-          <p:cNvPr id="22" name="Rectangle 21"/>
+              <a:rPr sz="1100" b="1" i="1">
+                <a:solidFill>
+                  <a:srgbClr val="C62828"/>
+                </a:solidFill>
+                <a:latin typeface="Calibri"/>
+              </a:rPr>
+              <a:t>Atacar onde os dados apontam:
+barreiras de ACESSO, não só salário</a:t>
+            </a:r>
+          </a:p>
+        </p:txBody>
+      </p:sp>
+      <p:sp>
+        <p:nvSpPr>
+          <p:cNvPr id="13" name="Rectangle 12"/>
           <p:cNvSpPr/>
           <p:nvPr/>
         </p:nvSpPr>
         <p:spPr>
           <a:xfrm>
-            <a:off x="0" y="6629400"/>
-            <a:ext cx="12188952" cy="228600"/>
+            <a:off x="4251959" y="1097280"/>
+            <a:ext cx="3749039" cy="5349240"/>
           </a:xfrm>
           <a:prstGeom prst="rect">
             <a:avLst/>
           </a:prstGeom>
           <a:solidFill>
-            <a:srgbClr val="1B2A4A"/>
+            <a:srgbClr val="F5F5F5"/>
           </a:solidFill>
-          <a:ln/>
+          <a:ln w="25400">
+            <a:solidFill>
+              <a:srgbClr val="1565C0"/>
+            </a:solidFill>
+          </a:ln>
         </p:spPr>
         <p:style>
           <a:lnRef idx="1">
@@ -14850,7 +11708,667 @@
       </p:sp>
       <p:sp>
         <p:nvSpPr>
+          <p:cNvPr id="14" name="Rectangle 13"/>
+          <p:cNvSpPr/>
+          <p:nvPr/>
+        </p:nvSpPr>
+        <p:spPr>
+          <a:xfrm>
+            <a:off x="4251959" y="1097280"/>
+            <a:ext cx="3749039" cy="502920"/>
+          </a:xfrm>
+          <a:prstGeom prst="rect">
+            <a:avLst/>
+          </a:prstGeom>
+          <a:solidFill>
+            <a:srgbClr val="1565C0"/>
+          </a:solidFill>
+          <a:ln/>
+        </p:spPr>
+        <p:style>
+          <a:lnRef idx="1">
+            <a:schemeClr val="accent1"/>
+          </a:lnRef>
+          <a:fillRef idx="3">
+            <a:schemeClr val="accent1"/>
+          </a:fillRef>
+          <a:effectRef idx="2">
+            <a:schemeClr val="accent1"/>
+          </a:effectRef>
+          <a:fontRef idx="minor">
+            <a:schemeClr val="lt1"/>
+          </a:fontRef>
+        </p:style>
+        <p:txBody>
+          <a:bodyPr rtlCol="0" anchor="ctr"/>
+          <a:lstStyle/>
+          <a:p>
+            <a:pPr algn="ctr"/>
+          </a:p>
+        </p:txBody>
+      </p:sp>
+      <p:sp>
+        <p:nvSpPr>
+          <p:cNvPr id="15" name="TextBox 14"/>
+          <p:cNvSpPr txBox="1"/>
+          <p:nvPr/>
+        </p:nvSpPr>
+        <p:spPr>
+          <a:xfrm>
+            <a:off x="4361687" y="1124712"/>
+            <a:ext cx="3529584" cy="457200"/>
+          </a:xfrm>
+          <a:prstGeom prst="rect">
+            <a:avLst/>
+          </a:prstGeom>
+          <a:noFill/>
+        </p:spPr>
+        <p:txBody>
+          <a:bodyPr wrap="square">
+            <a:spAutoFit/>
+          </a:bodyPr>
+          <a:lstStyle/>
+          <a:p>
+            <a:pPr algn="l"/>
+            <a:r>
+              <a:rPr sz="1500" b="1" i="0">
+                <a:solidFill>
+                  <a:srgbClr val="FFFFFF"/>
+                </a:solidFill>
+                <a:latin typeface="Calibri"/>
+              </a:rPr>
+              <a:t>Pagar Igual</a:t>
+            </a:r>
+          </a:p>
+        </p:txBody>
+      </p:sp>
+      <p:sp>
+        <p:nvSpPr>
+          <p:cNvPr id="16" name="TextBox 15"/>
+          <p:cNvSpPr txBox="1"/>
+          <p:nvPr/>
+        </p:nvSpPr>
+        <p:spPr>
+          <a:xfrm>
+            <a:off x="4434839" y="1691640"/>
+            <a:ext cx="3383280" cy="1097280"/>
+          </a:xfrm>
+          <a:prstGeom prst="rect">
+            <a:avLst/>
+          </a:prstGeom>
+          <a:noFill/>
+        </p:spPr>
+        <p:txBody>
+          <a:bodyPr wrap="square">
+            <a:spAutoFit/>
+          </a:bodyPr>
+          <a:lstStyle/>
+          <a:p>
+            <a:pPr algn="l"/>
+            <a:r>
+              <a:rPr sz="1200" b="0" i="0">
+                <a:solidFill>
+                  <a:srgbClr val="212121"/>
+                </a:solidFill>
+                <a:latin typeface="Calibri"/>
+              </a:rPr>
+              <a:t>Ação 1:
+Transparência salarial por raça
+obrigatória (empresas &gt; 100 fun.)</a:t>
+            </a:r>
+          </a:p>
+        </p:txBody>
+      </p:sp>
+      <p:sp>
+        <p:nvSpPr>
+          <p:cNvPr id="17" name="Rectangle 16"/>
+          <p:cNvSpPr/>
+          <p:nvPr/>
+        </p:nvSpPr>
+        <p:spPr>
+          <a:xfrm>
+            <a:off x="4434839" y="2834640"/>
+            <a:ext cx="3383280" cy="18288"/>
+          </a:xfrm>
+          <a:prstGeom prst="rect">
+            <a:avLst/>
+          </a:prstGeom>
+          <a:solidFill>
+            <a:srgbClr val="1565C0"/>
+          </a:solidFill>
+          <a:ln/>
+        </p:spPr>
+        <p:style>
+          <a:lnRef idx="1">
+            <a:schemeClr val="accent1"/>
+          </a:lnRef>
+          <a:fillRef idx="3">
+            <a:schemeClr val="accent1"/>
+          </a:fillRef>
+          <a:effectRef idx="2">
+            <a:schemeClr val="accent1"/>
+          </a:effectRef>
+          <a:fontRef idx="minor">
+            <a:schemeClr val="lt1"/>
+          </a:fontRef>
+        </p:style>
+        <p:txBody>
+          <a:bodyPr rtlCol="0" anchor="ctr"/>
+          <a:lstStyle/>
+          <a:p>
+            <a:pPr algn="ctr"/>
+          </a:p>
+        </p:txBody>
+      </p:sp>
+      <p:sp>
+        <p:nvSpPr>
+          <p:cNvPr id="18" name="TextBox 17"/>
+          <p:cNvSpPr txBox="1"/>
+          <p:nvPr/>
+        </p:nvSpPr>
+        <p:spPr>
+          <a:xfrm>
+            <a:off x="4434839" y="2926080"/>
+            <a:ext cx="3383280" cy="1097280"/>
+          </a:xfrm>
+          <a:prstGeom prst="rect">
+            <a:avLst/>
+          </a:prstGeom>
+          <a:noFill/>
+        </p:spPr>
+        <p:txBody>
+          <a:bodyPr wrap="square">
+            <a:spAutoFit/>
+          </a:bodyPr>
+          <a:lstStyle/>
+          <a:p>
+            <a:pPr algn="l"/>
+            <a:r>
+              <a:rPr sz="1200" b="0" i="0">
+                <a:solidFill>
+                  <a:srgbClr val="212121"/>
+                </a:solidFill>
+                <a:latin typeface="Calibri"/>
+              </a:rPr>
+              <a:t>Ação 2:
+Auditoria de igual pagamento
+por trabalho igual com
+penalidades progressivas</a:t>
+            </a:r>
+          </a:p>
+        </p:txBody>
+      </p:sp>
+      <p:sp>
+        <p:nvSpPr>
+          <p:cNvPr id="19" name="Rectangle 18"/>
+          <p:cNvSpPr/>
+          <p:nvPr/>
+        </p:nvSpPr>
+        <p:spPr>
+          <a:xfrm>
+            <a:off x="4343399" y="4114800"/>
+            <a:ext cx="3566160" cy="18288"/>
+          </a:xfrm>
+          <a:prstGeom prst="rect">
+            <a:avLst/>
+          </a:prstGeom>
+          <a:solidFill>
+            <a:srgbClr val="1565C0"/>
+          </a:solidFill>
+          <a:ln/>
+        </p:spPr>
+        <p:style>
+          <a:lnRef idx="1">
+            <a:schemeClr val="accent1"/>
+          </a:lnRef>
+          <a:fillRef idx="3">
+            <a:schemeClr val="accent1"/>
+          </a:fillRef>
+          <a:effectRef idx="2">
+            <a:schemeClr val="accent1"/>
+          </a:effectRef>
+          <a:fontRef idx="minor">
+            <a:schemeClr val="lt1"/>
+          </a:fontRef>
+        </p:style>
+        <p:txBody>
+          <a:bodyPr rtlCol="0" anchor="ctr"/>
+          <a:lstStyle/>
+          <a:p>
+            <a:pPr algn="ctr"/>
+          </a:p>
+        </p:txBody>
+      </p:sp>
+      <p:sp>
+        <p:nvSpPr>
+          <p:cNvPr id="20" name="TextBox 19"/>
+          <p:cNvSpPr txBox="1"/>
+          <p:nvPr/>
+        </p:nvSpPr>
+        <p:spPr>
+          <a:xfrm>
+            <a:off x="4389119" y="4206240"/>
+            <a:ext cx="3474720" cy="640080"/>
+          </a:xfrm>
+          <a:prstGeom prst="rect">
+            <a:avLst/>
+          </a:prstGeom>
+          <a:noFill/>
+        </p:spPr>
+        <p:txBody>
+          <a:bodyPr wrap="square">
+            <a:spAutoFit/>
+          </a:bodyPr>
+          <a:lstStyle/>
+          <a:p>
+            <a:pPr algn="l"/>
+            <a:r>
+              <a:rPr sz="1100" b="1" i="1">
+                <a:solidFill>
+                  <a:srgbClr val="1565C0"/>
+                </a:solidFill>
+                <a:latin typeface="Calibri"/>
+              </a:rPr>
+              <a:t>O gap residual de 6,2% é real
+e mensurável — e deve ser eliminado</a:t>
+            </a:r>
+          </a:p>
+        </p:txBody>
+      </p:sp>
+      <p:sp>
+        <p:nvSpPr>
+          <p:cNvPr id="21" name="Rectangle 20"/>
+          <p:cNvSpPr/>
+          <p:nvPr/>
+        </p:nvSpPr>
+        <p:spPr>
+          <a:xfrm>
+            <a:off x="8229598" y="1097280"/>
+            <a:ext cx="3749039" cy="5349240"/>
+          </a:xfrm>
+          <a:prstGeom prst="rect">
+            <a:avLst/>
+          </a:prstGeom>
+          <a:solidFill>
+            <a:srgbClr val="F5F5F5"/>
+          </a:solidFill>
+          <a:ln w="25400">
+            <a:solidFill>
+              <a:srgbClr val="2E7D32"/>
+            </a:solidFill>
+          </a:ln>
+        </p:spPr>
+        <p:style>
+          <a:lnRef idx="1">
+            <a:schemeClr val="accent1"/>
+          </a:lnRef>
+          <a:fillRef idx="3">
+            <a:schemeClr val="accent1"/>
+          </a:fillRef>
+          <a:effectRef idx="2">
+            <a:schemeClr val="accent1"/>
+          </a:effectRef>
+          <a:fontRef idx="minor">
+            <a:schemeClr val="lt1"/>
+          </a:fontRef>
+        </p:style>
+        <p:txBody>
+          <a:bodyPr rtlCol="0" anchor="ctr"/>
+          <a:lstStyle/>
+          <a:p>
+            <a:pPr algn="ctr"/>
+          </a:p>
+        </p:txBody>
+      </p:sp>
+      <p:sp>
+        <p:nvSpPr>
+          <p:cNvPr id="22" name="Rectangle 21"/>
+          <p:cNvSpPr/>
+          <p:nvPr/>
+        </p:nvSpPr>
+        <p:spPr>
+          <a:xfrm>
+            <a:off x="8229598" y="1097280"/>
+            <a:ext cx="3749039" cy="502920"/>
+          </a:xfrm>
+          <a:prstGeom prst="rect">
+            <a:avLst/>
+          </a:prstGeom>
+          <a:solidFill>
+            <a:srgbClr val="2E7D32"/>
+          </a:solidFill>
+          <a:ln/>
+        </p:spPr>
+        <p:style>
+          <a:lnRef idx="1">
+            <a:schemeClr val="accent1"/>
+          </a:lnRef>
+          <a:fillRef idx="3">
+            <a:schemeClr val="accent1"/>
+          </a:fillRef>
+          <a:effectRef idx="2">
+            <a:schemeClr val="accent1"/>
+          </a:effectRef>
+          <a:fontRef idx="minor">
+            <a:schemeClr val="lt1"/>
+          </a:fontRef>
+        </p:style>
+        <p:txBody>
+          <a:bodyPr rtlCol="0" anchor="ctr"/>
+          <a:lstStyle/>
+          <a:p>
+            <a:pPr algn="ctr"/>
+          </a:p>
+        </p:txBody>
+      </p:sp>
+      <p:sp>
+        <p:nvSpPr>
           <p:cNvPr id="23" name="TextBox 22"/>
+          <p:cNvSpPr txBox="1"/>
+          <p:nvPr/>
+        </p:nvSpPr>
+        <p:spPr>
+          <a:xfrm>
+            <a:off x="8339326" y="1124712"/>
+            <a:ext cx="3529584" cy="457200"/>
+          </a:xfrm>
+          <a:prstGeom prst="rect">
+            <a:avLst/>
+          </a:prstGeom>
+          <a:noFill/>
+        </p:spPr>
+        <p:txBody>
+          <a:bodyPr wrap="square">
+            <a:spAutoFit/>
+          </a:bodyPr>
+          <a:lstStyle/>
+          <a:p>
+            <a:pPr algn="l"/>
+            <a:r>
+              <a:rPr sz="1500" b="1" i="0">
+                <a:solidFill>
+                  <a:srgbClr val="FFFFFF"/>
+                </a:solidFill>
+                <a:latin typeface="Calibri"/>
+              </a:rPr>
+              <a:t>Ampliar as Redes</a:t>
+            </a:r>
+          </a:p>
+        </p:txBody>
+      </p:sp>
+      <p:sp>
+        <p:nvSpPr>
+          <p:cNvPr id="24" name="TextBox 23"/>
+          <p:cNvSpPr txBox="1"/>
+          <p:nvPr/>
+        </p:nvSpPr>
+        <p:spPr>
+          <a:xfrm>
+            <a:off x="8412478" y="1691640"/>
+            <a:ext cx="3383280" cy="1097280"/>
+          </a:xfrm>
+          <a:prstGeom prst="rect">
+            <a:avLst/>
+          </a:prstGeom>
+          <a:noFill/>
+        </p:spPr>
+        <p:txBody>
+          <a:bodyPr wrap="square">
+            <a:spAutoFit/>
+          </a:bodyPr>
+          <a:lstStyle/>
+          <a:p>
+            <a:pPr algn="l"/>
+            <a:r>
+              <a:rPr sz="1200" b="0" i="0">
+                <a:solidFill>
+                  <a:srgbClr val="212121"/>
+                </a:solidFill>
+                <a:latin typeface="Calibri"/>
+              </a:rPr>
+              <a:t>Ação 1:
+Mentoria estruturada para elevar
+a posição de negros nas redes
+profissionais</a:t>
+            </a:r>
+          </a:p>
+        </p:txBody>
+      </p:sp>
+      <p:sp>
+        <p:nvSpPr>
+          <p:cNvPr id="25" name="Rectangle 24"/>
+          <p:cNvSpPr/>
+          <p:nvPr/>
+        </p:nvSpPr>
+        <p:spPr>
+          <a:xfrm>
+            <a:off x="8412478" y="2834640"/>
+            <a:ext cx="3383280" cy="18288"/>
+          </a:xfrm>
+          <a:prstGeom prst="rect">
+            <a:avLst/>
+          </a:prstGeom>
+          <a:solidFill>
+            <a:srgbClr val="2E7D32"/>
+          </a:solidFill>
+          <a:ln/>
+        </p:spPr>
+        <p:style>
+          <a:lnRef idx="1">
+            <a:schemeClr val="accent1"/>
+          </a:lnRef>
+          <a:fillRef idx="3">
+            <a:schemeClr val="accent1"/>
+          </a:fillRef>
+          <a:effectRef idx="2">
+            <a:schemeClr val="accent1"/>
+          </a:effectRef>
+          <a:fontRef idx="minor">
+            <a:schemeClr val="lt1"/>
+          </a:fontRef>
+        </p:style>
+        <p:txBody>
+          <a:bodyPr rtlCol="0" anchor="ctr"/>
+          <a:lstStyle/>
+          <a:p>
+            <a:pPr algn="ctr"/>
+          </a:p>
+        </p:txBody>
+      </p:sp>
+      <p:sp>
+        <p:nvSpPr>
+          <p:cNvPr id="26" name="TextBox 25"/>
+          <p:cNvSpPr txBox="1"/>
+          <p:nvPr/>
+        </p:nvSpPr>
+        <p:spPr>
+          <a:xfrm>
+            <a:off x="8412478" y="2926080"/>
+            <a:ext cx="3383280" cy="1097280"/>
+          </a:xfrm>
+          <a:prstGeom prst="rect">
+            <a:avLst/>
+          </a:prstGeom>
+          <a:noFill/>
+        </p:spPr>
+        <p:txBody>
+          <a:bodyPr wrap="square">
+            <a:spAutoFit/>
+          </a:bodyPr>
+          <a:lstStyle/>
+          <a:p>
+            <a:pPr algn="l"/>
+            <a:r>
+              <a:rPr sz="1200" b="0" i="0">
+                <a:solidFill>
+                  <a:srgbClr val="212121"/>
+                </a:solidFill>
+                <a:latin typeface="Calibri"/>
+              </a:rPr>
+              <a:t>Ação 2:
+30% dos cargos de liderança
+(DAS + corporativo) para negros
+até 2030</a:t>
+            </a:r>
+          </a:p>
+        </p:txBody>
+      </p:sp>
+      <p:sp>
+        <p:nvSpPr>
+          <p:cNvPr id="27" name="Rectangle 26"/>
+          <p:cNvSpPr/>
+          <p:nvPr/>
+        </p:nvSpPr>
+        <p:spPr>
+          <a:xfrm>
+            <a:off x="8321038" y="4114800"/>
+            <a:ext cx="3566160" cy="18288"/>
+          </a:xfrm>
+          <a:prstGeom prst="rect">
+            <a:avLst/>
+          </a:prstGeom>
+          <a:solidFill>
+            <a:srgbClr val="2E7D32"/>
+          </a:solidFill>
+          <a:ln/>
+        </p:spPr>
+        <p:style>
+          <a:lnRef idx="1">
+            <a:schemeClr val="accent1"/>
+          </a:lnRef>
+          <a:fillRef idx="3">
+            <a:schemeClr val="accent1"/>
+          </a:fillRef>
+          <a:effectRef idx="2">
+            <a:schemeClr val="accent1"/>
+          </a:effectRef>
+          <a:fontRef idx="minor">
+            <a:schemeClr val="lt1"/>
+          </a:fontRef>
+        </p:style>
+        <p:txBody>
+          <a:bodyPr rtlCol="0" anchor="ctr"/>
+          <a:lstStyle/>
+          <a:p>
+            <a:pPr algn="ctr"/>
+          </a:p>
+        </p:txBody>
+      </p:sp>
+      <p:sp>
+        <p:nvSpPr>
+          <p:cNvPr id="28" name="TextBox 27"/>
+          <p:cNvSpPr txBox="1"/>
+          <p:nvPr/>
+        </p:nvSpPr>
+        <p:spPr>
+          <a:xfrm>
+            <a:off x="8366758" y="4206240"/>
+            <a:ext cx="3474720" cy="640080"/>
+          </a:xfrm>
+          <a:prstGeom prst="rect">
+            <a:avLst/>
+          </a:prstGeom>
+          <a:noFill/>
+        </p:spPr>
+        <p:txBody>
+          <a:bodyPr wrap="square">
+            <a:spAutoFit/>
+          </a:bodyPr>
+          <a:lstStyle/>
+          <a:p>
+            <a:pPr algn="l"/>
+            <a:r>
+              <a:rPr sz="1100" b="1" i="1">
+                <a:solidFill>
+                  <a:srgbClr val="2E7D32"/>
+                </a:solidFill>
+                <a:latin typeface="Calibri"/>
+              </a:rPr>
+              <a:t>Sem acesso às redes que convertem
+diplomas em empregos, nada muda</a:t>
+            </a:r>
+          </a:p>
+        </p:txBody>
+      </p:sp>
+      <p:sp>
+        <p:nvSpPr>
+          <p:cNvPr id="29" name="TextBox 28"/>
+          <p:cNvSpPr txBox="1"/>
+          <p:nvPr/>
+        </p:nvSpPr>
+        <p:spPr>
+          <a:xfrm>
+            <a:off x="274320" y="6355080"/>
+            <a:ext cx="11612880" cy="347472"/>
+          </a:xfrm>
+          <a:prstGeom prst="rect">
+            <a:avLst/>
+          </a:prstGeom>
+          <a:noFill/>
+        </p:spPr>
+        <p:txBody>
+          <a:bodyPr wrap="square">
+            <a:spAutoFit/>
+          </a:bodyPr>
+          <a:lstStyle/>
+          <a:p>
+            <a:pPr algn="ctr"/>
+            <a:r>
+              <a:rPr sz="1300" b="1" i="0">
+                <a:solidFill>
+                  <a:srgbClr val="C62828"/>
+                </a:solidFill>
+                <a:latin typeface="Calibri"/>
+              </a:rPr>
+              <a:t>⚠  Sem ação simultânea nos três eixos, fechar o gap levará mais de 100 anos no ritmo atual.</a:t>
+            </a:r>
+          </a:p>
+        </p:txBody>
+      </p:sp>
+      <p:sp>
+        <p:nvSpPr>
+          <p:cNvPr id="30" name="Rectangle 29"/>
+          <p:cNvSpPr/>
+          <p:nvPr/>
+        </p:nvSpPr>
+        <p:spPr>
+          <a:xfrm>
+            <a:off x="0" y="6629400"/>
+            <a:ext cx="12188952" cy="228600"/>
+          </a:xfrm>
+          <a:prstGeom prst="rect">
+            <a:avLst/>
+          </a:prstGeom>
+          <a:solidFill>
+            <a:srgbClr val="1B2A4A"/>
+          </a:solidFill>
+          <a:ln/>
+        </p:spPr>
+        <p:style>
+          <a:lnRef idx="1">
+            <a:schemeClr val="accent1"/>
+          </a:lnRef>
+          <a:fillRef idx="3">
+            <a:schemeClr val="accent1"/>
+          </a:fillRef>
+          <a:effectRef idx="2">
+            <a:schemeClr val="accent1"/>
+          </a:effectRef>
+          <a:fontRef idx="minor">
+            <a:schemeClr val="lt1"/>
+          </a:fontRef>
+        </p:style>
+        <p:txBody>
+          <a:bodyPr rtlCol="0" anchor="ctr"/>
+          <a:lstStyle/>
+          <a:p>
+            <a:pPr algn="ctr"/>
+          </a:p>
+        </p:txBody>
+      </p:sp>
+      <p:sp>
+        <p:nvSpPr>
+          <p:cNvPr id="31" name="TextBox 30"/>
           <p:cNvSpPr txBox="1"/>
           <p:nvPr/>
         </p:nvSpPr>
@@ -14885,7 +12403,7 @@
       </p:sp>
       <p:sp>
         <p:nvSpPr>
-          <p:cNvPr id="24" name="TextBox 23"/>
+          <p:cNvPr id="32" name="TextBox 31"/>
           <p:cNvSpPr txBox="1"/>
           <p:nvPr/>
         </p:nvSpPr>
@@ -14913,7 +12431,7 @@
                 </a:solidFill>
                 <a:latin typeface="Calibri"/>
               </a:rPr>
-              <a:t>9/14</a:t>
+              <a:t>12/14</a:t>
             </a:r>
           </a:p>
         </p:txBody>
